--- a/slides/S2_LoRa.pptx
+++ b/slides/S2_LoRa.pptx
@@ -5,18 +5,21 @@
     <p:sldMasterId id="2147483648" r:id="rId1"/>
   </p:sldMasterIdLst>
   <p:notesMasterIdLst>
-    <p:notesMasterId r:id="rId11"/>
+    <p:notesMasterId r:id="rId14"/>
   </p:notesMasterIdLst>
   <p:sldIdLst>
     <p:sldId id="256" r:id="rId2"/>
     <p:sldId id="275" r:id="rId3"/>
     <p:sldId id="276" r:id="rId4"/>
     <p:sldId id="267" r:id="rId5"/>
-    <p:sldId id="277" r:id="rId6"/>
-    <p:sldId id="278" r:id="rId7"/>
-    <p:sldId id="282" r:id="rId8"/>
-    <p:sldId id="283" r:id="rId9"/>
-    <p:sldId id="302" r:id="rId10"/>
+    <p:sldId id="303" r:id="rId6"/>
+    <p:sldId id="304" r:id="rId7"/>
+    <p:sldId id="305" r:id="rId8"/>
+    <p:sldId id="277" r:id="rId9"/>
+    <p:sldId id="278" r:id="rId10"/>
+    <p:sldId id="282" r:id="rId11"/>
+    <p:sldId id="283" r:id="rId12"/>
+    <p:sldId id="302" r:id="rId13"/>
   </p:sldIdLst>
   <p:sldSz cx="12192000" cy="6858000"/>
   <p:notesSz cx="6858000" cy="9144000"/>
@@ -205,7 +208,7 @@
           <a:p>
             <a:fld id="{DAA656B2-ED32-8044-9B2A-829653741135}" type="datetimeFigureOut">
               <a:rPr lang="nl-NL" smtClean="0"/>
-              <a:t>18-03-2026</a:t>
+              <a:t>22-03-2026</a:t>
             </a:fld>
             <a:endParaRPr lang="nl-NL"/>
           </a:p>
@@ -592,6 +595,495 @@
 </p:notes>
 </file>
 
+<file path=ppt/notesSlides/notesSlide2.xml><?xml version="1.0" encoding="utf-8"?>
+<p:notes xmlns:a="http://schemas.openxmlformats.org/drawingml/2006/main" xmlns:r="http://schemas.openxmlformats.org/officeDocument/2006/relationships" xmlns:p="http://schemas.openxmlformats.org/presentationml/2006/main">
+  <p:cSld>
+    <p:spTree>
+      <p:nvGrpSpPr>
+        <p:cNvPr id="1" name=""/>
+        <p:cNvGrpSpPr/>
+        <p:nvPr/>
+      </p:nvGrpSpPr>
+      <p:grpSpPr>
+        <a:xfrm>
+          <a:off x="0" y="0"/>
+          <a:ext cx="0" cy="0"/>
+          <a:chOff x="0" y="0"/>
+          <a:chExt cx="0" cy="0"/>
+        </a:xfrm>
+      </p:grpSpPr>
+      <p:sp>
+        <p:nvSpPr>
+          <p:cNvPr id="2" name="Tijdelijke aanduiding voor dia-afbeelding 1"/>
+          <p:cNvSpPr>
+            <a:spLocks noGrp="1" noRot="1" noChangeAspect="1"/>
+          </p:cNvSpPr>
+          <p:nvPr>
+            <p:ph type="sldImg"/>
+          </p:nvPr>
+        </p:nvSpPr>
+        <p:spPr/>
+      </p:sp>
+      <p:sp>
+        <p:nvSpPr>
+          <p:cNvPr id="3" name="Tijdelijke aanduiding voor notities 2"/>
+          <p:cNvSpPr>
+            <a:spLocks noGrp="1"/>
+          </p:cNvSpPr>
+          <p:nvPr>
+            <p:ph type="body" idx="1"/>
+          </p:nvPr>
+        </p:nvSpPr>
+        <p:spPr/>
+        <p:txBody>
+          <a:bodyPr/>
+          <a:lstStyle/>
+          <a:p>
+            <a:r>
+              <a:rPr lang="nl-NL" dirty="0" err="1"/>
+              <a:t>What</a:t>
+            </a:r>
+            <a:r>
+              <a:rPr lang="nl-NL" dirty="0"/>
+              <a:t> is </a:t>
+            </a:r>
+            <a:r>
+              <a:rPr lang="nl-NL" dirty="0" err="1"/>
+              <a:t>LoRaWAN</a:t>
+            </a:r>
+            <a:r>
+              <a:rPr lang="nl-NL" dirty="0"/>
+              <a:t>: </a:t>
+            </a:r>
+            <a:r>
+              <a:rPr lang="nl-NL" dirty="0" err="1"/>
+              <a:t>https</a:t>
+            </a:r>
+            <a:r>
+              <a:rPr lang="nl-NL" dirty="0"/>
+              <a:t>://</a:t>
+            </a:r>
+            <a:r>
+              <a:rPr lang="nl-NL" dirty="0" err="1"/>
+              <a:t>www.thethingsnetwork.org</a:t>
+            </a:r>
+            <a:r>
+              <a:rPr lang="nl-NL" dirty="0"/>
+              <a:t>/</a:t>
+            </a:r>
+            <a:r>
+              <a:rPr lang="nl-NL" dirty="0" err="1"/>
+              <a:t>docs</a:t>
+            </a:r>
+            <a:r>
+              <a:rPr lang="nl-NL" dirty="0"/>
+              <a:t>/</a:t>
+            </a:r>
+            <a:r>
+              <a:rPr lang="nl-NL" dirty="0" err="1"/>
+              <a:t>lorawan</a:t>
+            </a:r>
+            <a:r>
+              <a:rPr lang="nl-NL" dirty="0"/>
+              <a:t>/</a:t>
+            </a:r>
+            <a:r>
+              <a:rPr lang="nl-NL" dirty="0" err="1"/>
+              <a:t>what</a:t>
+            </a:r>
+            <a:r>
+              <a:rPr lang="nl-NL" dirty="0"/>
+              <a:t>-is-</a:t>
+            </a:r>
+            <a:r>
+              <a:rPr lang="nl-NL" dirty="0" err="1"/>
+              <a:t>lorawan</a:t>
+            </a:r>
+            <a:r>
+              <a:rPr lang="nl-NL" dirty="0"/>
+              <a:t>/</a:t>
+            </a:r>
+          </a:p>
+        </p:txBody>
+      </p:sp>
+      <p:sp>
+        <p:nvSpPr>
+          <p:cNvPr id="4" name="Tijdelijke aanduiding voor dianummer 3"/>
+          <p:cNvSpPr>
+            <a:spLocks noGrp="1"/>
+          </p:cNvSpPr>
+          <p:nvPr>
+            <p:ph type="sldNum" sz="quarter" idx="5"/>
+          </p:nvPr>
+        </p:nvSpPr>
+        <p:spPr/>
+        <p:txBody>
+          <a:bodyPr/>
+          <a:lstStyle/>
+          <a:p>
+            <a:fld id="{11B76DE4-D675-834A-A8C5-F6A601043E90}" type="slidenum">
+              <a:rPr lang="nl-NL" smtClean="0"/>
+              <a:t>5</a:t>
+            </a:fld>
+            <a:endParaRPr lang="nl-NL"/>
+          </a:p>
+        </p:txBody>
+      </p:sp>
+    </p:spTree>
+    <p:extLst>
+      <p:ext uri="{BB962C8B-B14F-4D97-AF65-F5344CB8AC3E}">
+        <p14:creationId xmlns:p14="http://schemas.microsoft.com/office/powerpoint/2010/main" val="1373914168"/>
+      </p:ext>
+    </p:extLst>
+  </p:cSld>
+  <p:clrMapOvr>
+    <a:masterClrMapping/>
+  </p:clrMapOvr>
+</p:notes>
+</file>
+
+<file path=ppt/notesSlides/notesSlide3.xml><?xml version="1.0" encoding="utf-8"?>
+<p:notes xmlns:a="http://schemas.openxmlformats.org/drawingml/2006/main" xmlns:r="http://schemas.openxmlformats.org/officeDocument/2006/relationships" xmlns:p="http://schemas.openxmlformats.org/presentationml/2006/main">
+  <p:cSld>
+    <p:spTree>
+      <p:nvGrpSpPr>
+        <p:cNvPr id="1" name="">
+          <a:extLst>
+            <a:ext uri="{FF2B5EF4-FFF2-40B4-BE49-F238E27FC236}">
+              <a16:creationId xmlns:a16="http://schemas.microsoft.com/office/drawing/2014/main" id="{C7AC2C48-B814-1FCF-AB08-01A63C862578}"/>
+            </a:ext>
+          </a:extLst>
+        </p:cNvPr>
+        <p:cNvGrpSpPr/>
+        <p:nvPr/>
+      </p:nvGrpSpPr>
+      <p:grpSpPr>
+        <a:xfrm>
+          <a:off x="0" y="0"/>
+          <a:ext cx="0" cy="0"/>
+          <a:chOff x="0" y="0"/>
+          <a:chExt cx="0" cy="0"/>
+        </a:xfrm>
+      </p:grpSpPr>
+      <p:sp>
+        <p:nvSpPr>
+          <p:cNvPr id="2" name="Tijdelijke aanduiding voor dia-afbeelding 1">
+            <a:extLst>
+              <a:ext uri="{FF2B5EF4-FFF2-40B4-BE49-F238E27FC236}">
+                <a16:creationId xmlns:a16="http://schemas.microsoft.com/office/drawing/2014/main" id="{D1128D6D-D12B-D71D-260B-1A4DD4BDC5C4}"/>
+              </a:ext>
+            </a:extLst>
+          </p:cNvPr>
+          <p:cNvSpPr>
+            <a:spLocks noGrp="1" noRot="1" noChangeAspect="1"/>
+          </p:cNvSpPr>
+          <p:nvPr>
+            <p:ph type="sldImg"/>
+          </p:nvPr>
+        </p:nvSpPr>
+        <p:spPr/>
+      </p:sp>
+      <p:sp>
+        <p:nvSpPr>
+          <p:cNvPr id="3" name="Tijdelijke aanduiding voor notities 2">
+            <a:extLst>
+              <a:ext uri="{FF2B5EF4-FFF2-40B4-BE49-F238E27FC236}">
+                <a16:creationId xmlns:a16="http://schemas.microsoft.com/office/drawing/2014/main" id="{7ADB8596-B718-07D7-155B-3F25E5A0AAFE}"/>
+              </a:ext>
+            </a:extLst>
+          </p:cNvPr>
+          <p:cNvSpPr>
+            <a:spLocks noGrp="1"/>
+          </p:cNvSpPr>
+          <p:nvPr>
+            <p:ph type="body" idx="1"/>
+          </p:nvPr>
+        </p:nvSpPr>
+        <p:spPr/>
+        <p:txBody>
+          <a:bodyPr/>
+          <a:lstStyle/>
+          <a:p>
+            <a:r>
+              <a:rPr lang="nl-NL" dirty="0" err="1"/>
+              <a:t>What</a:t>
+            </a:r>
+            <a:r>
+              <a:rPr lang="nl-NL" dirty="0"/>
+              <a:t> is </a:t>
+            </a:r>
+            <a:r>
+              <a:rPr lang="nl-NL" dirty="0" err="1"/>
+              <a:t>LoRaWAN</a:t>
+            </a:r>
+            <a:r>
+              <a:rPr lang="nl-NL" dirty="0"/>
+              <a:t>: </a:t>
+            </a:r>
+            <a:r>
+              <a:rPr lang="nl-NL" dirty="0" err="1"/>
+              <a:t>https</a:t>
+            </a:r>
+            <a:r>
+              <a:rPr lang="nl-NL" dirty="0"/>
+              <a:t>://</a:t>
+            </a:r>
+            <a:r>
+              <a:rPr lang="nl-NL" dirty="0" err="1"/>
+              <a:t>www.thethingsnetwork.org</a:t>
+            </a:r>
+            <a:r>
+              <a:rPr lang="nl-NL" dirty="0"/>
+              <a:t>/</a:t>
+            </a:r>
+            <a:r>
+              <a:rPr lang="nl-NL" dirty="0" err="1"/>
+              <a:t>docs</a:t>
+            </a:r>
+            <a:r>
+              <a:rPr lang="nl-NL" dirty="0"/>
+              <a:t>/</a:t>
+            </a:r>
+            <a:r>
+              <a:rPr lang="nl-NL" dirty="0" err="1"/>
+              <a:t>lorawan</a:t>
+            </a:r>
+            <a:r>
+              <a:rPr lang="nl-NL" dirty="0"/>
+              <a:t>/</a:t>
+            </a:r>
+            <a:r>
+              <a:rPr lang="nl-NL" dirty="0" err="1"/>
+              <a:t>what</a:t>
+            </a:r>
+            <a:r>
+              <a:rPr lang="nl-NL" dirty="0"/>
+              <a:t>-is-</a:t>
+            </a:r>
+            <a:r>
+              <a:rPr lang="nl-NL" dirty="0" err="1"/>
+              <a:t>lorawan</a:t>
+            </a:r>
+            <a:r>
+              <a:rPr lang="nl-NL" dirty="0"/>
+              <a:t>/</a:t>
+            </a:r>
+          </a:p>
+        </p:txBody>
+      </p:sp>
+      <p:sp>
+        <p:nvSpPr>
+          <p:cNvPr id="4" name="Tijdelijke aanduiding voor dianummer 3">
+            <a:extLst>
+              <a:ext uri="{FF2B5EF4-FFF2-40B4-BE49-F238E27FC236}">
+                <a16:creationId xmlns:a16="http://schemas.microsoft.com/office/drawing/2014/main" id="{3BF1E685-68FA-B9D6-7715-B06118CA498C}"/>
+              </a:ext>
+            </a:extLst>
+          </p:cNvPr>
+          <p:cNvSpPr>
+            <a:spLocks noGrp="1"/>
+          </p:cNvSpPr>
+          <p:nvPr>
+            <p:ph type="sldNum" sz="quarter" idx="5"/>
+          </p:nvPr>
+        </p:nvSpPr>
+        <p:spPr/>
+        <p:txBody>
+          <a:bodyPr/>
+          <a:lstStyle/>
+          <a:p>
+            <a:fld id="{11B76DE4-D675-834A-A8C5-F6A601043E90}" type="slidenum">
+              <a:rPr lang="nl-NL" smtClean="0"/>
+              <a:t>6</a:t>
+            </a:fld>
+            <a:endParaRPr lang="nl-NL"/>
+          </a:p>
+        </p:txBody>
+      </p:sp>
+    </p:spTree>
+    <p:extLst>
+      <p:ext uri="{BB962C8B-B14F-4D97-AF65-F5344CB8AC3E}">
+        <p14:creationId xmlns:p14="http://schemas.microsoft.com/office/powerpoint/2010/main" val="3341673625"/>
+      </p:ext>
+    </p:extLst>
+  </p:cSld>
+  <p:clrMapOvr>
+    <a:masterClrMapping/>
+  </p:clrMapOvr>
+</p:notes>
+</file>
+
+<file path=ppt/notesSlides/notesSlide4.xml><?xml version="1.0" encoding="utf-8"?>
+<p:notes xmlns:a="http://schemas.openxmlformats.org/drawingml/2006/main" xmlns:r="http://schemas.openxmlformats.org/officeDocument/2006/relationships" xmlns:p="http://schemas.openxmlformats.org/presentationml/2006/main">
+  <p:cSld>
+    <p:spTree>
+      <p:nvGrpSpPr>
+        <p:cNvPr id="1" name="">
+          <a:extLst>
+            <a:ext uri="{FF2B5EF4-FFF2-40B4-BE49-F238E27FC236}">
+              <a16:creationId xmlns:a16="http://schemas.microsoft.com/office/drawing/2014/main" id="{3DA918C8-B197-8981-8264-E6574D4D0C8B}"/>
+            </a:ext>
+          </a:extLst>
+        </p:cNvPr>
+        <p:cNvGrpSpPr/>
+        <p:nvPr/>
+      </p:nvGrpSpPr>
+      <p:grpSpPr>
+        <a:xfrm>
+          <a:off x="0" y="0"/>
+          <a:ext cx="0" cy="0"/>
+          <a:chOff x="0" y="0"/>
+          <a:chExt cx="0" cy="0"/>
+        </a:xfrm>
+      </p:grpSpPr>
+      <p:sp>
+        <p:nvSpPr>
+          <p:cNvPr id="2" name="Tijdelijke aanduiding voor dia-afbeelding 1">
+            <a:extLst>
+              <a:ext uri="{FF2B5EF4-FFF2-40B4-BE49-F238E27FC236}">
+                <a16:creationId xmlns:a16="http://schemas.microsoft.com/office/drawing/2014/main" id="{44226214-E8F8-A6D8-8308-5CF8A35A77F4}"/>
+              </a:ext>
+            </a:extLst>
+          </p:cNvPr>
+          <p:cNvSpPr>
+            <a:spLocks noGrp="1" noRot="1" noChangeAspect="1"/>
+          </p:cNvSpPr>
+          <p:nvPr>
+            <p:ph type="sldImg"/>
+          </p:nvPr>
+        </p:nvSpPr>
+        <p:spPr/>
+      </p:sp>
+      <p:sp>
+        <p:nvSpPr>
+          <p:cNvPr id="3" name="Tijdelijke aanduiding voor notities 2">
+            <a:extLst>
+              <a:ext uri="{FF2B5EF4-FFF2-40B4-BE49-F238E27FC236}">
+                <a16:creationId xmlns:a16="http://schemas.microsoft.com/office/drawing/2014/main" id="{44AE94FC-B3F0-5C26-631E-423E6E096066}"/>
+              </a:ext>
+            </a:extLst>
+          </p:cNvPr>
+          <p:cNvSpPr>
+            <a:spLocks noGrp="1"/>
+          </p:cNvSpPr>
+          <p:nvPr>
+            <p:ph type="body" idx="1"/>
+          </p:nvPr>
+        </p:nvSpPr>
+        <p:spPr/>
+        <p:txBody>
+          <a:bodyPr/>
+          <a:lstStyle/>
+          <a:p>
+            <a:r>
+              <a:rPr lang="nl-NL" dirty="0" err="1"/>
+              <a:t>What</a:t>
+            </a:r>
+            <a:r>
+              <a:rPr lang="nl-NL" dirty="0"/>
+              <a:t> is </a:t>
+            </a:r>
+            <a:r>
+              <a:rPr lang="nl-NL" dirty="0" err="1"/>
+              <a:t>LoRaWAN</a:t>
+            </a:r>
+            <a:r>
+              <a:rPr lang="nl-NL" dirty="0"/>
+              <a:t>: </a:t>
+            </a:r>
+            <a:r>
+              <a:rPr lang="nl-NL" dirty="0" err="1"/>
+              <a:t>https</a:t>
+            </a:r>
+            <a:r>
+              <a:rPr lang="nl-NL" dirty="0"/>
+              <a:t>://</a:t>
+            </a:r>
+            <a:r>
+              <a:rPr lang="nl-NL" dirty="0" err="1"/>
+              <a:t>www.thethingsnetwork.org</a:t>
+            </a:r>
+            <a:r>
+              <a:rPr lang="nl-NL" dirty="0"/>
+              <a:t>/</a:t>
+            </a:r>
+            <a:r>
+              <a:rPr lang="nl-NL" dirty="0" err="1"/>
+              <a:t>docs</a:t>
+            </a:r>
+            <a:r>
+              <a:rPr lang="nl-NL" dirty="0"/>
+              <a:t>/</a:t>
+            </a:r>
+            <a:r>
+              <a:rPr lang="nl-NL" dirty="0" err="1"/>
+              <a:t>lorawan</a:t>
+            </a:r>
+            <a:r>
+              <a:rPr lang="nl-NL" dirty="0"/>
+              <a:t>/</a:t>
+            </a:r>
+            <a:r>
+              <a:rPr lang="nl-NL" dirty="0" err="1"/>
+              <a:t>what</a:t>
+            </a:r>
+            <a:r>
+              <a:rPr lang="nl-NL" dirty="0"/>
+              <a:t>-is-</a:t>
+            </a:r>
+            <a:r>
+              <a:rPr lang="nl-NL" dirty="0" err="1"/>
+              <a:t>lorawan</a:t>
+            </a:r>
+            <a:r>
+              <a:rPr lang="nl-NL" dirty="0"/>
+              <a:t>/</a:t>
+            </a:r>
+          </a:p>
+        </p:txBody>
+      </p:sp>
+      <p:sp>
+        <p:nvSpPr>
+          <p:cNvPr id="4" name="Tijdelijke aanduiding voor dianummer 3">
+            <a:extLst>
+              <a:ext uri="{FF2B5EF4-FFF2-40B4-BE49-F238E27FC236}">
+                <a16:creationId xmlns:a16="http://schemas.microsoft.com/office/drawing/2014/main" id="{85C8E740-F944-A140-5ACE-8AD762DF103A}"/>
+              </a:ext>
+            </a:extLst>
+          </p:cNvPr>
+          <p:cNvSpPr>
+            <a:spLocks noGrp="1"/>
+          </p:cNvSpPr>
+          <p:nvPr>
+            <p:ph type="sldNum" sz="quarter" idx="5"/>
+          </p:nvPr>
+        </p:nvSpPr>
+        <p:spPr/>
+        <p:txBody>
+          <a:bodyPr/>
+          <a:lstStyle/>
+          <a:p>
+            <a:fld id="{11B76DE4-D675-834A-A8C5-F6A601043E90}" type="slidenum">
+              <a:rPr lang="nl-NL" smtClean="0"/>
+              <a:t>7</a:t>
+            </a:fld>
+            <a:endParaRPr lang="nl-NL"/>
+          </a:p>
+        </p:txBody>
+      </p:sp>
+    </p:spTree>
+    <p:extLst>
+      <p:ext uri="{BB962C8B-B14F-4D97-AF65-F5344CB8AC3E}">
+        <p14:creationId xmlns:p14="http://schemas.microsoft.com/office/powerpoint/2010/main" val="2162180827"/>
+      </p:ext>
+    </p:extLst>
+  </p:cSld>
+  <p:clrMapOvr>
+    <a:masterClrMapping/>
+  </p:clrMapOvr>
+</p:notes>
+</file>
+
 <file path=ppt/slideLayouts/slideLayout1.xml><?xml version="1.0" encoding="utf-8"?>
 <p:sldLayout xmlns:a="http://schemas.openxmlformats.org/drawingml/2006/main" xmlns:r="http://schemas.openxmlformats.org/officeDocument/2006/relationships" xmlns:p="http://schemas.openxmlformats.org/presentationml/2006/main" type="title" preserve="1">
   <p:cSld name="Title Slide">
@@ -741,7 +1233,7 @@
           <a:p>
             <a:fld id="{3A7CBCB4-1EFE-4E3B-9C8A-BCC4F06648F3}" type="datetimeFigureOut">
               <a:rPr lang="en-NL" smtClean="0"/>
-              <a:t>3/18/26</a:t>
+              <a:t>3/22/26</a:t>
             </a:fld>
             <a:endParaRPr lang="en-NL"/>
           </a:p>
@@ -941,7 +1433,7 @@
           <a:p>
             <a:fld id="{3A7CBCB4-1EFE-4E3B-9C8A-BCC4F06648F3}" type="datetimeFigureOut">
               <a:rPr lang="en-NL" smtClean="0"/>
-              <a:t>3/18/26</a:t>
+              <a:t>3/22/26</a:t>
             </a:fld>
             <a:endParaRPr lang="en-NL"/>
           </a:p>
@@ -1151,7 +1643,7 @@
           <a:p>
             <a:fld id="{3A7CBCB4-1EFE-4E3B-9C8A-BCC4F06648F3}" type="datetimeFigureOut">
               <a:rPr lang="en-NL" smtClean="0"/>
-              <a:t>3/18/26</a:t>
+              <a:t>3/22/26</a:t>
             </a:fld>
             <a:endParaRPr lang="en-NL"/>
           </a:p>
@@ -1351,7 +1843,7 @@
           <a:p>
             <a:fld id="{3A7CBCB4-1EFE-4E3B-9C8A-BCC4F06648F3}" type="datetimeFigureOut">
               <a:rPr lang="en-NL" smtClean="0"/>
-              <a:t>3/18/26</a:t>
+              <a:t>3/22/26</a:t>
             </a:fld>
             <a:endParaRPr lang="en-NL"/>
           </a:p>
@@ -1627,7 +2119,7 @@
           <a:p>
             <a:fld id="{3A7CBCB4-1EFE-4E3B-9C8A-BCC4F06648F3}" type="datetimeFigureOut">
               <a:rPr lang="en-NL" smtClean="0"/>
-              <a:t>3/18/26</a:t>
+              <a:t>3/22/26</a:t>
             </a:fld>
             <a:endParaRPr lang="en-NL"/>
           </a:p>
@@ -1895,7 +2387,7 @@
           <a:p>
             <a:fld id="{3A7CBCB4-1EFE-4E3B-9C8A-BCC4F06648F3}" type="datetimeFigureOut">
               <a:rPr lang="en-NL" smtClean="0"/>
-              <a:t>3/18/26</a:t>
+              <a:t>3/22/26</a:t>
             </a:fld>
             <a:endParaRPr lang="en-NL"/>
           </a:p>
@@ -2310,7 +2802,7 @@
           <a:p>
             <a:fld id="{3A7CBCB4-1EFE-4E3B-9C8A-BCC4F06648F3}" type="datetimeFigureOut">
               <a:rPr lang="en-NL" smtClean="0"/>
-              <a:t>3/18/26</a:t>
+              <a:t>3/22/26</a:t>
             </a:fld>
             <a:endParaRPr lang="en-NL"/>
           </a:p>
@@ -2452,7 +2944,7 @@
           <a:p>
             <a:fld id="{3A7CBCB4-1EFE-4E3B-9C8A-BCC4F06648F3}" type="datetimeFigureOut">
               <a:rPr lang="en-NL" smtClean="0"/>
-              <a:t>3/18/26</a:t>
+              <a:t>3/22/26</a:t>
             </a:fld>
             <a:endParaRPr lang="en-NL"/>
           </a:p>
@@ -2565,7 +3057,7 @@
           <a:p>
             <a:fld id="{3A7CBCB4-1EFE-4E3B-9C8A-BCC4F06648F3}" type="datetimeFigureOut">
               <a:rPr lang="en-NL" smtClean="0"/>
-              <a:t>3/18/26</a:t>
+              <a:t>3/22/26</a:t>
             </a:fld>
             <a:endParaRPr lang="en-NL"/>
           </a:p>
@@ -2878,7 +3370,7 @@
           <a:p>
             <a:fld id="{3A7CBCB4-1EFE-4E3B-9C8A-BCC4F06648F3}" type="datetimeFigureOut">
               <a:rPr lang="en-NL" smtClean="0"/>
-              <a:t>3/18/26</a:t>
+              <a:t>3/22/26</a:t>
             </a:fld>
             <a:endParaRPr lang="en-NL"/>
           </a:p>
@@ -3167,7 +3659,7 @@
           <a:p>
             <a:fld id="{3A7CBCB4-1EFE-4E3B-9C8A-BCC4F06648F3}" type="datetimeFigureOut">
               <a:rPr lang="en-NL" smtClean="0"/>
-              <a:t>3/18/26</a:t>
+              <a:t>3/22/26</a:t>
             </a:fld>
             <a:endParaRPr lang="en-NL"/>
           </a:p>
@@ -3410,7 +3902,7 @@
           <a:p>
             <a:fld id="{3A7CBCB4-1EFE-4E3B-9C8A-BCC4F06648F3}" type="datetimeFigureOut">
               <a:rPr lang="en-NL" smtClean="0"/>
-              <a:t>3/18/26</a:t>
+              <a:t>3/22/26</a:t>
             </a:fld>
             <a:endParaRPr lang="en-NL"/>
           </a:p>
@@ -3978,6 +4470,1685 @@
 </p:sld>
 </file>
 
+<file path=ppt/slides/slide10.xml><?xml version="1.0" encoding="utf-8"?>
+<p:sld xmlns:a="http://schemas.openxmlformats.org/drawingml/2006/main" xmlns:r="http://schemas.openxmlformats.org/officeDocument/2006/relationships" xmlns:p="http://schemas.openxmlformats.org/presentationml/2006/main">
+  <p:cSld>
+    <p:spTree>
+      <p:nvGrpSpPr>
+        <p:cNvPr id="1" name="">
+          <a:extLst>
+            <a:ext uri="{FF2B5EF4-FFF2-40B4-BE49-F238E27FC236}">
+              <a16:creationId xmlns:a16="http://schemas.microsoft.com/office/drawing/2014/main" id="{10B34F92-CC12-7C6D-A70B-3DDE78DD27CA}"/>
+            </a:ext>
+          </a:extLst>
+        </p:cNvPr>
+        <p:cNvGrpSpPr/>
+        <p:nvPr/>
+      </p:nvGrpSpPr>
+      <p:grpSpPr>
+        <a:xfrm>
+          <a:off x="0" y="0"/>
+          <a:ext cx="0" cy="0"/>
+          <a:chOff x="0" y="0"/>
+          <a:chExt cx="0" cy="0"/>
+        </a:xfrm>
+      </p:grpSpPr>
+      <p:sp>
+        <p:nvSpPr>
+          <p:cNvPr id="2" name="Title 1">
+            <a:extLst>
+              <a:ext uri="{FF2B5EF4-FFF2-40B4-BE49-F238E27FC236}">
+                <a16:creationId xmlns:a16="http://schemas.microsoft.com/office/drawing/2014/main" id="{9B4343F3-ACB2-4864-38BD-6802694FFC9B}"/>
+              </a:ext>
+            </a:extLst>
+          </p:cNvPr>
+          <p:cNvSpPr>
+            <a:spLocks noGrp="1"/>
+          </p:cNvSpPr>
+          <p:nvPr>
+            <p:ph type="title"/>
+          </p:nvPr>
+        </p:nvSpPr>
+        <p:spPr/>
+        <p:txBody>
+          <a:bodyPr/>
+          <a:lstStyle/>
+          <a:p>
+            <a:r>
+              <a:rPr lang="en-US" dirty="0"/>
+              <a:t>Keys </a:t>
+            </a:r>
+            <a:r>
+              <a:rPr lang="en-US" dirty="0" err="1"/>
+              <a:t>toelichting</a:t>
+            </a:r>
+            <a:endParaRPr lang="en-NL" dirty="0"/>
+          </a:p>
+        </p:txBody>
+      </p:sp>
+      <p:sp>
+        <p:nvSpPr>
+          <p:cNvPr id="3" name="Content Placeholder 2">
+            <a:extLst>
+              <a:ext uri="{FF2B5EF4-FFF2-40B4-BE49-F238E27FC236}">
+                <a16:creationId xmlns:a16="http://schemas.microsoft.com/office/drawing/2014/main" id="{56761677-057A-B305-D372-73561DC178B2}"/>
+              </a:ext>
+            </a:extLst>
+          </p:cNvPr>
+          <p:cNvSpPr>
+            <a:spLocks noGrp="1"/>
+          </p:cNvSpPr>
+          <p:nvPr>
+            <p:ph idx="1"/>
+          </p:nvPr>
+        </p:nvSpPr>
+        <p:spPr/>
+        <p:txBody>
+          <a:bodyPr>
+            <a:normAutofit fontScale="77500" lnSpcReduction="20000"/>
+          </a:bodyPr>
+          <a:lstStyle/>
+          <a:p>
+            <a:pPr marL="0" indent="0">
+              <a:buNone/>
+            </a:pPr>
+            <a:r>
+              <a:rPr lang="nn-NO" sz="2800" dirty="0" err="1">
+                <a:highlight>
+                  <a:srgbClr val="FFFFFF"/>
+                </a:highlight>
+              </a:rPr>
+              <a:t>Bij</a:t>
+            </a:r>
+            <a:r>
+              <a:rPr lang="nn-NO" sz="2800" dirty="0">
+                <a:highlight>
+                  <a:srgbClr val="FFFFFF"/>
+                </a:highlight>
+              </a:rPr>
+              <a:t> OTAA kom </a:t>
+            </a:r>
+            <a:r>
+              <a:rPr lang="nn-NO" sz="2800" dirty="0" err="1">
+                <a:highlight>
+                  <a:srgbClr val="FFFFFF"/>
+                </a:highlight>
+              </a:rPr>
+              <a:t>je</a:t>
+            </a:r>
+            <a:r>
+              <a:rPr lang="nn-NO" sz="2800" dirty="0">
+                <a:highlight>
+                  <a:srgbClr val="FFFFFF"/>
+                </a:highlight>
+              </a:rPr>
+              <a:t> </a:t>
+            </a:r>
+            <a:r>
+              <a:rPr lang="nn-NO" sz="2800" dirty="0" err="1">
+                <a:highlight>
+                  <a:srgbClr val="FFFFFF"/>
+                </a:highlight>
+              </a:rPr>
+              <a:t>meestal</a:t>
+            </a:r>
+            <a:r>
+              <a:rPr lang="nn-NO" sz="2800" dirty="0">
+                <a:highlight>
+                  <a:srgbClr val="FFFFFF"/>
+                </a:highlight>
+              </a:rPr>
+              <a:t> </a:t>
+            </a:r>
+            <a:r>
+              <a:rPr lang="nn-NO" sz="2800" dirty="0" err="1">
+                <a:highlight>
+                  <a:srgbClr val="FFFFFF"/>
+                </a:highlight>
+              </a:rPr>
+              <a:t>deze</a:t>
+            </a:r>
+            <a:r>
+              <a:rPr lang="nn-NO" sz="2800" dirty="0">
+                <a:highlight>
+                  <a:srgbClr val="FFFFFF"/>
+                </a:highlight>
+              </a:rPr>
+              <a:t> velden </a:t>
+            </a:r>
+            <a:r>
+              <a:rPr lang="nn-NO" sz="2800" dirty="0" err="1">
+                <a:highlight>
+                  <a:srgbClr val="FFFFFF"/>
+                </a:highlight>
+              </a:rPr>
+              <a:t>tegen</a:t>
+            </a:r>
+            <a:r>
+              <a:rPr lang="nn-NO" sz="2800" dirty="0">
+                <a:highlight>
+                  <a:srgbClr val="FFFFFF"/>
+                </a:highlight>
+              </a:rPr>
+              <a:t>:</a:t>
+            </a:r>
+          </a:p>
+          <a:p>
+            <a:pPr marL="0" indent="0">
+              <a:buNone/>
+            </a:pPr>
+            <a:r>
+              <a:rPr lang="nn-NO" sz="2800" b="1" dirty="0" err="1">
+                <a:highlight>
+                  <a:srgbClr val="FFFFFF"/>
+                </a:highlight>
+              </a:rPr>
+              <a:t>DevEUI</a:t>
+            </a:r>
+            <a:r>
+              <a:rPr lang="nn-NO" b="1" dirty="0">
+                <a:highlight>
+                  <a:srgbClr val="FFFFFF"/>
+                </a:highlight>
+              </a:rPr>
+              <a:t>: </a:t>
+            </a:r>
+            <a:r>
+              <a:rPr lang="nn-NO" sz="2800" dirty="0" err="1">
+                <a:highlight>
+                  <a:srgbClr val="FFFFFF"/>
+                </a:highlight>
+              </a:rPr>
+              <a:t>Unieke</a:t>
+            </a:r>
+            <a:r>
+              <a:rPr lang="nn-NO" sz="2800" dirty="0">
+                <a:highlight>
+                  <a:srgbClr val="FFFFFF"/>
+                </a:highlight>
+              </a:rPr>
+              <a:t> </a:t>
+            </a:r>
+            <a:r>
+              <a:rPr lang="nn-NO" sz="2800" dirty="0" err="1">
+                <a:highlight>
+                  <a:srgbClr val="FFFFFF"/>
+                </a:highlight>
+              </a:rPr>
+              <a:t>identiteit</a:t>
+            </a:r>
+            <a:r>
+              <a:rPr lang="nn-NO" sz="2800" dirty="0">
+                <a:highlight>
+                  <a:srgbClr val="FFFFFF"/>
+                </a:highlight>
+              </a:rPr>
+              <a:t> van het </a:t>
+            </a:r>
+            <a:r>
+              <a:rPr lang="nn-NO" sz="2800" dirty="0" err="1">
+                <a:highlight>
+                  <a:srgbClr val="FFFFFF"/>
+                </a:highlight>
+              </a:rPr>
+              <a:t>device</a:t>
+            </a:r>
+            <a:r>
+              <a:rPr lang="nn-NO" sz="2800" dirty="0">
+                <a:highlight>
+                  <a:srgbClr val="FFFFFF"/>
+                </a:highlight>
+              </a:rPr>
+              <a:t>. </a:t>
+            </a:r>
+            <a:r>
+              <a:rPr lang="nn-NO" sz="2800" dirty="0" err="1">
+                <a:highlight>
+                  <a:srgbClr val="FFFFFF"/>
+                </a:highlight>
+              </a:rPr>
+              <a:t>Vergelijkbaar</a:t>
+            </a:r>
+            <a:r>
+              <a:rPr lang="nn-NO" sz="2800" dirty="0">
+                <a:highlight>
+                  <a:srgbClr val="FFFFFF"/>
+                </a:highlight>
+              </a:rPr>
+              <a:t> </a:t>
+            </a:r>
+            <a:r>
+              <a:rPr lang="nn-NO" sz="2800" dirty="0" err="1">
+                <a:highlight>
+                  <a:srgbClr val="FFFFFF"/>
+                </a:highlight>
+              </a:rPr>
+              <a:t>met</a:t>
+            </a:r>
+            <a:r>
+              <a:rPr lang="nn-NO" sz="2800" dirty="0">
+                <a:highlight>
+                  <a:srgbClr val="FFFFFF"/>
+                </a:highlight>
+              </a:rPr>
+              <a:t> </a:t>
+            </a:r>
+            <a:r>
+              <a:rPr lang="nn-NO" sz="2800" dirty="0" err="1">
+                <a:highlight>
+                  <a:srgbClr val="FFFFFF"/>
+                </a:highlight>
+              </a:rPr>
+              <a:t>een</a:t>
+            </a:r>
+            <a:r>
+              <a:rPr lang="nn-NO" sz="2800" dirty="0">
+                <a:highlight>
+                  <a:srgbClr val="FFFFFF"/>
+                </a:highlight>
+              </a:rPr>
+              <a:t> serienummer </a:t>
+            </a:r>
+            <a:r>
+              <a:rPr lang="nn-NO" sz="2800" dirty="0" err="1">
+                <a:highlight>
+                  <a:srgbClr val="FFFFFF"/>
+                </a:highlight>
+              </a:rPr>
+              <a:t>binnen</a:t>
+            </a:r>
+            <a:r>
+              <a:rPr lang="nn-NO" sz="2800" dirty="0">
+                <a:highlight>
+                  <a:srgbClr val="FFFFFF"/>
+                </a:highlight>
+              </a:rPr>
+              <a:t> het </a:t>
+            </a:r>
+            <a:r>
+              <a:rPr lang="nn-NO" sz="2800" dirty="0" err="1">
+                <a:highlight>
+                  <a:srgbClr val="FFFFFF"/>
+                </a:highlight>
+              </a:rPr>
+              <a:t>LoRaWAN-systeem</a:t>
+            </a:r>
+            <a:r>
+              <a:rPr lang="nn-NO" sz="2800" dirty="0">
+                <a:highlight>
+                  <a:srgbClr val="FFFFFF"/>
+                </a:highlight>
+              </a:rPr>
+              <a:t>.</a:t>
+            </a:r>
+          </a:p>
+          <a:p>
+            <a:pPr marL="0" indent="0">
+              <a:buNone/>
+            </a:pPr>
+            <a:r>
+              <a:rPr lang="nn-NO" sz="2800" b="1" dirty="0" err="1">
+                <a:highlight>
+                  <a:srgbClr val="FFFFFF"/>
+                </a:highlight>
+              </a:rPr>
+              <a:t>JoinEUI</a:t>
+            </a:r>
+            <a:r>
+              <a:rPr lang="nn-NO" sz="2800" b="1" dirty="0">
+                <a:highlight>
+                  <a:srgbClr val="FFFFFF"/>
+                </a:highlight>
+              </a:rPr>
+              <a:t>: </a:t>
+            </a:r>
+            <a:r>
+              <a:rPr lang="nn-NO" sz="2800" dirty="0" err="1">
+                <a:highlight>
+                  <a:srgbClr val="FFFFFF"/>
+                </a:highlight>
+              </a:rPr>
+              <a:t>Identificeert</a:t>
+            </a:r>
+            <a:r>
+              <a:rPr lang="nn-NO" sz="2800" dirty="0">
+                <a:highlight>
+                  <a:srgbClr val="FFFFFF"/>
+                </a:highlight>
+              </a:rPr>
+              <a:t> </a:t>
+            </a:r>
+            <a:r>
+              <a:rPr lang="nn-NO" sz="2800" dirty="0" err="1">
+                <a:highlight>
+                  <a:srgbClr val="FFFFFF"/>
+                </a:highlight>
+              </a:rPr>
+              <a:t>bij</a:t>
+            </a:r>
+            <a:r>
+              <a:rPr lang="nn-NO" sz="2800" dirty="0">
+                <a:highlight>
+                  <a:srgbClr val="FFFFFF"/>
+                </a:highlight>
+              </a:rPr>
+              <a:t> </a:t>
+            </a:r>
+            <a:r>
+              <a:rPr lang="nn-NO" sz="2800" dirty="0" err="1">
+                <a:highlight>
+                  <a:srgbClr val="FFFFFF"/>
+                </a:highlight>
+              </a:rPr>
+              <a:t>welke</a:t>
+            </a:r>
+            <a:r>
+              <a:rPr lang="nn-NO" sz="2800" dirty="0">
+                <a:highlight>
+                  <a:srgbClr val="FFFFFF"/>
+                </a:highlight>
+              </a:rPr>
+              <a:t> join-</a:t>
+            </a:r>
+            <a:r>
+              <a:rPr lang="nn-NO" sz="2800" dirty="0" err="1">
+                <a:highlight>
+                  <a:srgbClr val="FFFFFF"/>
+                </a:highlight>
+              </a:rPr>
+              <a:t>context</a:t>
+            </a:r>
+            <a:r>
+              <a:rPr lang="nn-NO" sz="2800" dirty="0">
+                <a:highlight>
+                  <a:srgbClr val="FFFFFF"/>
+                </a:highlight>
+              </a:rPr>
+              <a:t> </a:t>
+            </a:r>
+            <a:r>
+              <a:rPr lang="nn-NO" sz="2800" dirty="0" err="1">
+                <a:highlight>
+                  <a:srgbClr val="FFFFFF"/>
+                </a:highlight>
+              </a:rPr>
+              <a:t>of</a:t>
+            </a:r>
+            <a:r>
+              <a:rPr lang="nn-NO" sz="2800" dirty="0">
+                <a:highlight>
+                  <a:srgbClr val="FFFFFF"/>
+                </a:highlight>
+              </a:rPr>
+              <a:t> </a:t>
+            </a:r>
+            <a:r>
+              <a:rPr lang="nn-NO" sz="2800" dirty="0" err="1">
+                <a:highlight>
+                  <a:srgbClr val="FFFFFF"/>
+                </a:highlight>
+              </a:rPr>
+              <a:t>leverancier</a:t>
+            </a:r>
+            <a:r>
+              <a:rPr lang="nn-NO" sz="2800" dirty="0">
+                <a:highlight>
+                  <a:srgbClr val="FFFFFF"/>
+                </a:highlight>
+              </a:rPr>
+              <a:t> het </a:t>
+            </a:r>
+            <a:r>
+              <a:rPr lang="nn-NO" sz="2800" dirty="0" err="1">
+                <a:highlight>
+                  <a:srgbClr val="FFFFFF"/>
+                </a:highlight>
+              </a:rPr>
+              <a:t>device</a:t>
+            </a:r>
+            <a:r>
+              <a:rPr lang="nn-NO" sz="2800" dirty="0">
+                <a:highlight>
+                  <a:srgbClr val="FFFFFF"/>
+                </a:highlight>
+              </a:rPr>
+              <a:t> </a:t>
+            </a:r>
+            <a:r>
+              <a:rPr lang="nn-NO" sz="2800" dirty="0" err="1">
+                <a:highlight>
+                  <a:srgbClr val="FFFFFF"/>
+                </a:highlight>
+              </a:rPr>
+              <a:t>hoort</a:t>
+            </a:r>
+            <a:r>
+              <a:rPr lang="nn-NO" sz="2800" dirty="0">
+                <a:highlight>
+                  <a:srgbClr val="FFFFFF"/>
+                </a:highlight>
+              </a:rPr>
+              <a:t>. </a:t>
+            </a:r>
+            <a:r>
+              <a:rPr lang="nn-NO" sz="2800" dirty="0" err="1">
+                <a:highlight>
+                  <a:srgbClr val="FFFFFF"/>
+                </a:highlight>
+              </a:rPr>
+              <a:t>Bij</a:t>
+            </a:r>
+            <a:r>
+              <a:rPr lang="nn-NO" sz="2800" dirty="0">
+                <a:highlight>
+                  <a:srgbClr val="FFFFFF"/>
+                </a:highlight>
+              </a:rPr>
+              <a:t> </a:t>
+            </a:r>
+            <a:r>
+              <a:rPr lang="nn-NO" sz="2800" dirty="0" err="1">
+                <a:highlight>
+                  <a:srgbClr val="FFFFFF"/>
+                </a:highlight>
+              </a:rPr>
+              <a:t>handmatig</a:t>
+            </a:r>
+            <a:r>
+              <a:rPr lang="nn-NO" sz="2800" dirty="0">
+                <a:highlight>
+                  <a:srgbClr val="FFFFFF"/>
+                </a:highlight>
+              </a:rPr>
+              <a:t> </a:t>
+            </a:r>
+            <a:r>
+              <a:rPr lang="nn-NO" sz="2800" dirty="0" err="1">
+                <a:highlight>
+                  <a:srgbClr val="FFFFFF"/>
+                </a:highlight>
+              </a:rPr>
+              <a:t>geregistreerde</a:t>
+            </a:r>
+            <a:r>
+              <a:rPr lang="nn-NO" sz="2800" dirty="0">
+                <a:highlight>
+                  <a:srgbClr val="FFFFFF"/>
+                </a:highlight>
+              </a:rPr>
+              <a:t> </a:t>
+            </a:r>
+            <a:r>
+              <a:rPr lang="nn-NO" sz="2800" dirty="0" err="1">
+                <a:highlight>
+                  <a:srgbClr val="FFFFFF"/>
+                </a:highlight>
+              </a:rPr>
+              <a:t>custom</a:t>
+            </a:r>
+            <a:r>
+              <a:rPr lang="nn-NO" sz="2800" dirty="0">
+                <a:highlight>
+                  <a:srgbClr val="FFFFFF"/>
+                </a:highlight>
+              </a:rPr>
+              <a:t> </a:t>
+            </a:r>
+            <a:r>
+              <a:rPr lang="nn-NO" sz="2800" dirty="0" err="1">
+                <a:highlight>
+                  <a:srgbClr val="FFFFFF"/>
+                </a:highlight>
+              </a:rPr>
+              <a:t>devices</a:t>
+            </a:r>
+            <a:r>
+              <a:rPr lang="nn-NO" sz="2800" dirty="0">
+                <a:highlight>
+                  <a:srgbClr val="FFFFFF"/>
+                </a:highlight>
+              </a:rPr>
+              <a:t> </a:t>
+            </a:r>
+            <a:r>
+              <a:rPr lang="nn-NO" sz="2800" dirty="0" err="1">
+                <a:highlight>
+                  <a:srgbClr val="FFFFFF"/>
+                </a:highlight>
+              </a:rPr>
+              <a:t>wordt</a:t>
+            </a:r>
+            <a:r>
+              <a:rPr lang="nn-NO" sz="2800" dirty="0">
+                <a:highlight>
+                  <a:srgbClr val="FFFFFF"/>
+                </a:highlight>
+              </a:rPr>
+              <a:t> </a:t>
+            </a:r>
+            <a:r>
+              <a:rPr lang="nn-NO" sz="2800" dirty="0" err="1">
+                <a:highlight>
+                  <a:srgbClr val="FFFFFF"/>
+                </a:highlight>
+              </a:rPr>
+              <a:t>vaak</a:t>
+            </a:r>
+            <a:r>
+              <a:rPr lang="nn-NO" sz="2800" dirty="0">
+                <a:highlight>
+                  <a:srgbClr val="FFFFFF"/>
+                </a:highlight>
+              </a:rPr>
+              <a:t> </a:t>
+            </a:r>
+            <a:r>
+              <a:rPr lang="nn-NO" sz="2800" dirty="0" err="1">
+                <a:highlight>
+                  <a:srgbClr val="FFFFFF"/>
+                </a:highlight>
+              </a:rPr>
+              <a:t>een</a:t>
+            </a:r>
+            <a:r>
+              <a:rPr lang="nn-NO" sz="2800" dirty="0">
+                <a:highlight>
+                  <a:srgbClr val="FFFFFF"/>
+                </a:highlight>
+              </a:rPr>
+              <a:t> </a:t>
+            </a:r>
+            <a:r>
+              <a:rPr lang="nn-NO" sz="2800" dirty="0" err="1">
+                <a:highlight>
+                  <a:srgbClr val="FFFFFF"/>
+                </a:highlight>
+              </a:rPr>
+              <a:t>vaste</a:t>
+            </a:r>
+            <a:r>
+              <a:rPr lang="nn-NO" sz="2800" dirty="0">
+                <a:highlight>
+                  <a:srgbClr val="FFFFFF"/>
+                </a:highlight>
+              </a:rPr>
+              <a:t> </a:t>
+            </a:r>
+            <a:r>
+              <a:rPr lang="nn-NO" sz="2800" dirty="0" err="1">
+                <a:highlight>
+                  <a:srgbClr val="FFFFFF"/>
+                </a:highlight>
+              </a:rPr>
+              <a:t>waarde</a:t>
+            </a:r>
+            <a:r>
+              <a:rPr lang="nn-NO" sz="2800" dirty="0">
+                <a:highlight>
+                  <a:srgbClr val="FFFFFF"/>
+                </a:highlight>
+              </a:rPr>
+              <a:t> </a:t>
+            </a:r>
+            <a:r>
+              <a:rPr lang="nn-NO" sz="2800" dirty="0" err="1">
+                <a:highlight>
+                  <a:srgbClr val="FFFFFF"/>
+                </a:highlight>
+              </a:rPr>
+              <a:t>gebruikt</a:t>
+            </a:r>
+            <a:r>
+              <a:rPr lang="nn-NO" sz="2800" dirty="0">
+                <a:highlight>
+                  <a:srgbClr val="FFFFFF"/>
+                </a:highlight>
+              </a:rPr>
+              <a:t>, </a:t>
+            </a:r>
+            <a:r>
+              <a:rPr lang="nn-NO" sz="2800" dirty="0" err="1">
+                <a:highlight>
+                  <a:srgbClr val="FFFFFF"/>
+                </a:highlight>
+              </a:rPr>
+              <a:t>bijvoorbeeld</a:t>
+            </a:r>
+            <a:r>
+              <a:rPr lang="nn-NO" sz="2800" dirty="0">
+                <a:highlight>
+                  <a:srgbClr val="FFFFFF"/>
+                </a:highlight>
+              </a:rPr>
+              <a:t> </a:t>
+            </a:r>
+            <a:r>
+              <a:rPr lang="nn-NO" sz="2800" dirty="0" err="1">
+                <a:highlight>
+                  <a:srgbClr val="FFFFFF"/>
+                </a:highlight>
+              </a:rPr>
+              <a:t>allemaal</a:t>
+            </a:r>
+            <a:r>
+              <a:rPr lang="nn-NO" sz="2800" dirty="0">
+                <a:highlight>
+                  <a:srgbClr val="FFFFFF"/>
+                </a:highlight>
+              </a:rPr>
+              <a:t> nullen, </a:t>
+            </a:r>
+            <a:r>
+              <a:rPr lang="nn-NO" sz="2800" dirty="0" err="1">
+                <a:highlight>
+                  <a:srgbClr val="FFFFFF"/>
+                </a:highlight>
+              </a:rPr>
+              <a:t>als</a:t>
+            </a:r>
+            <a:r>
+              <a:rPr lang="nn-NO" sz="2800" dirty="0">
+                <a:highlight>
+                  <a:srgbClr val="FFFFFF"/>
+                </a:highlight>
+              </a:rPr>
+              <a:t> </a:t>
+            </a:r>
+            <a:r>
+              <a:rPr lang="nn-NO" sz="2800" dirty="0" err="1">
+                <a:highlight>
+                  <a:srgbClr val="FFFFFF"/>
+                </a:highlight>
+              </a:rPr>
+              <a:t>dat</a:t>
+            </a:r>
+            <a:r>
+              <a:rPr lang="nn-NO" sz="2800" dirty="0">
+                <a:highlight>
+                  <a:srgbClr val="FFFFFF"/>
+                </a:highlight>
+              </a:rPr>
+              <a:t> </a:t>
+            </a:r>
+            <a:r>
+              <a:rPr lang="nn-NO" sz="2800" dirty="0" err="1">
+                <a:highlight>
+                  <a:srgbClr val="FFFFFF"/>
+                </a:highlight>
+              </a:rPr>
+              <a:t>zo</a:t>
+            </a:r>
+            <a:r>
+              <a:rPr lang="nn-NO" sz="2800" dirty="0">
+                <a:highlight>
+                  <a:srgbClr val="FFFFFF"/>
+                </a:highlight>
+              </a:rPr>
+              <a:t> in de </a:t>
+            </a:r>
+            <a:r>
+              <a:rPr lang="nn-NO" sz="2800" dirty="0" err="1">
+                <a:highlight>
+                  <a:srgbClr val="FFFFFF"/>
+                </a:highlight>
+              </a:rPr>
+              <a:t>provisioning</a:t>
+            </a:r>
+            <a:r>
+              <a:rPr lang="nn-NO" sz="2800" dirty="0">
+                <a:highlight>
+                  <a:srgbClr val="FFFFFF"/>
+                </a:highlight>
+              </a:rPr>
+              <a:t> is </a:t>
+            </a:r>
+            <a:r>
+              <a:rPr lang="nn-NO" sz="2800" dirty="0" err="1">
+                <a:highlight>
+                  <a:srgbClr val="FFFFFF"/>
+                </a:highlight>
+              </a:rPr>
+              <a:t>gekozen</a:t>
+            </a:r>
+            <a:r>
+              <a:rPr lang="nn-NO" sz="2800" dirty="0">
+                <a:highlight>
+                  <a:srgbClr val="FFFFFF"/>
+                </a:highlight>
+              </a:rPr>
+              <a:t>.</a:t>
+            </a:r>
+          </a:p>
+          <a:p>
+            <a:pPr marL="0" indent="0">
+              <a:buNone/>
+            </a:pPr>
+            <a:r>
+              <a:rPr lang="nn-NO" sz="2800" b="1" dirty="0" err="1">
+                <a:highlight>
+                  <a:srgbClr val="FFFFFF"/>
+                </a:highlight>
+              </a:rPr>
+              <a:t>AppKey</a:t>
+            </a:r>
+            <a:r>
+              <a:rPr lang="nn-NO" b="1" dirty="0">
+                <a:highlight>
+                  <a:srgbClr val="FFFFFF"/>
+                </a:highlight>
+              </a:rPr>
+              <a:t>: </a:t>
+            </a:r>
+            <a:r>
+              <a:rPr lang="nn-NO" sz="2800" dirty="0" err="1">
+                <a:highlight>
+                  <a:srgbClr val="FFFFFF"/>
+                </a:highlight>
+              </a:rPr>
+              <a:t>Een</a:t>
+            </a:r>
+            <a:r>
+              <a:rPr lang="nn-NO" sz="2800" dirty="0">
+                <a:highlight>
+                  <a:srgbClr val="FFFFFF"/>
+                </a:highlight>
+              </a:rPr>
+              <a:t> </a:t>
+            </a:r>
+            <a:r>
+              <a:rPr lang="nn-NO" sz="2800" dirty="0" err="1">
+                <a:highlight>
+                  <a:srgbClr val="FFFFFF"/>
+                </a:highlight>
+              </a:rPr>
+              <a:t>root</a:t>
+            </a:r>
+            <a:r>
+              <a:rPr lang="nn-NO" sz="2800" dirty="0">
+                <a:highlight>
+                  <a:srgbClr val="FFFFFF"/>
+                </a:highlight>
+              </a:rPr>
+              <a:t> </a:t>
+            </a:r>
+            <a:r>
+              <a:rPr lang="nn-NO" sz="2800" dirty="0" err="1">
+                <a:highlight>
+                  <a:srgbClr val="FFFFFF"/>
+                </a:highlight>
+              </a:rPr>
+              <a:t>key</a:t>
+            </a:r>
+            <a:r>
+              <a:rPr lang="nn-NO" sz="2800" dirty="0">
+                <a:highlight>
+                  <a:srgbClr val="FFFFFF"/>
+                </a:highlight>
+              </a:rPr>
+              <a:t> die </a:t>
+            </a:r>
+            <a:r>
+              <a:rPr lang="nn-NO" sz="2800" dirty="0" err="1">
+                <a:highlight>
+                  <a:srgbClr val="FFFFFF"/>
+                </a:highlight>
+              </a:rPr>
+              <a:t>gebruikt</a:t>
+            </a:r>
+            <a:r>
+              <a:rPr lang="nn-NO" sz="2800" dirty="0">
+                <a:highlight>
+                  <a:srgbClr val="FFFFFF"/>
+                </a:highlight>
+              </a:rPr>
+              <a:t> </a:t>
+            </a:r>
+            <a:r>
+              <a:rPr lang="nn-NO" sz="2800" dirty="0" err="1">
+                <a:highlight>
+                  <a:srgbClr val="FFFFFF"/>
+                </a:highlight>
+              </a:rPr>
+              <a:t>wordt</a:t>
+            </a:r>
+            <a:r>
+              <a:rPr lang="nn-NO" sz="2800" dirty="0">
+                <a:highlight>
+                  <a:srgbClr val="FFFFFF"/>
+                </a:highlight>
+              </a:rPr>
+              <a:t> </a:t>
+            </a:r>
+            <a:r>
+              <a:rPr lang="nn-NO" sz="2800" dirty="0" err="1">
+                <a:highlight>
+                  <a:srgbClr val="FFFFFF"/>
+                </a:highlight>
+              </a:rPr>
+              <a:t>tijdens</a:t>
+            </a:r>
+            <a:r>
+              <a:rPr lang="nn-NO" sz="2800" dirty="0">
+                <a:highlight>
+                  <a:srgbClr val="FFFFFF"/>
+                </a:highlight>
+              </a:rPr>
+              <a:t> het join-</a:t>
+            </a:r>
+            <a:r>
+              <a:rPr lang="nn-NO" sz="2800" dirty="0" err="1">
+                <a:highlight>
+                  <a:srgbClr val="FFFFFF"/>
+                </a:highlight>
+              </a:rPr>
+              <a:t>proces</a:t>
+            </a:r>
+            <a:r>
+              <a:rPr lang="nn-NO" sz="2800" dirty="0">
+                <a:highlight>
+                  <a:srgbClr val="FFFFFF"/>
+                </a:highlight>
+              </a:rPr>
+              <a:t> en </a:t>
+            </a:r>
+            <a:r>
+              <a:rPr lang="nn-NO" sz="2800" dirty="0" err="1">
+                <a:highlight>
+                  <a:srgbClr val="FFFFFF"/>
+                </a:highlight>
+              </a:rPr>
+              <a:t>voor</a:t>
+            </a:r>
+            <a:r>
+              <a:rPr lang="nn-NO" sz="2800" dirty="0">
+                <a:highlight>
+                  <a:srgbClr val="FFFFFF"/>
+                </a:highlight>
+              </a:rPr>
+              <a:t> </a:t>
+            </a:r>
+            <a:r>
+              <a:rPr lang="nn-NO" sz="2800" dirty="0" err="1">
+                <a:highlight>
+                  <a:srgbClr val="FFFFFF"/>
+                </a:highlight>
+              </a:rPr>
+              <a:t>beveiliging</a:t>
+            </a:r>
+            <a:r>
+              <a:rPr lang="nn-NO" sz="2800" dirty="0">
+                <a:highlight>
+                  <a:srgbClr val="FFFFFF"/>
+                </a:highlight>
+              </a:rPr>
+              <a:t> van </a:t>
+            </a:r>
+            <a:r>
+              <a:rPr lang="nn-NO" sz="2800" dirty="0" err="1">
+                <a:highlight>
+                  <a:srgbClr val="FFFFFF"/>
+                </a:highlight>
+              </a:rPr>
+              <a:t>applicatiedata</a:t>
+            </a:r>
+            <a:r>
+              <a:rPr lang="nn-NO" sz="2800" dirty="0">
+                <a:highlight>
+                  <a:srgbClr val="FFFFFF"/>
+                </a:highlight>
+              </a:rPr>
+              <a:t>.</a:t>
+            </a:r>
+          </a:p>
+          <a:p>
+            <a:pPr marL="0" indent="0">
+              <a:buNone/>
+            </a:pPr>
+            <a:r>
+              <a:rPr lang="nn-NO" sz="2800" b="1" dirty="0" err="1">
+                <a:highlight>
+                  <a:srgbClr val="FFFFFF"/>
+                </a:highlight>
+              </a:rPr>
+              <a:t>NwkKey</a:t>
+            </a:r>
+            <a:r>
+              <a:rPr lang="nn-NO" b="1" dirty="0">
+                <a:highlight>
+                  <a:srgbClr val="FFFFFF"/>
+                </a:highlight>
+              </a:rPr>
+              <a:t>: </a:t>
+            </a:r>
+            <a:r>
+              <a:rPr lang="nn-NO" sz="2800" dirty="0" err="1">
+                <a:highlight>
+                  <a:srgbClr val="FFFFFF"/>
+                </a:highlight>
+              </a:rPr>
+              <a:t>Bij</a:t>
+            </a:r>
+            <a:r>
+              <a:rPr lang="nn-NO" sz="2800" dirty="0">
+                <a:highlight>
+                  <a:srgbClr val="FFFFFF"/>
+                </a:highlight>
+              </a:rPr>
+              <a:t> </a:t>
+            </a:r>
+            <a:r>
+              <a:rPr lang="nn-NO" sz="2800" dirty="0" err="1">
+                <a:highlight>
+                  <a:srgbClr val="FFFFFF"/>
+                </a:highlight>
+              </a:rPr>
+              <a:t>LoRaWAN</a:t>
+            </a:r>
+            <a:r>
+              <a:rPr lang="nn-NO" sz="2800" dirty="0">
+                <a:highlight>
+                  <a:srgbClr val="FFFFFF"/>
+                </a:highlight>
+              </a:rPr>
+              <a:t> 1.1 is </a:t>
+            </a:r>
+            <a:r>
+              <a:rPr lang="nn-NO" sz="2800" dirty="0" err="1">
+                <a:highlight>
+                  <a:srgbClr val="FFFFFF"/>
+                </a:highlight>
+              </a:rPr>
+              <a:t>ook</a:t>
+            </a:r>
+            <a:r>
+              <a:rPr lang="nn-NO" sz="2800" dirty="0">
+                <a:highlight>
+                  <a:srgbClr val="FFFFFF"/>
+                </a:highlight>
+              </a:rPr>
+              <a:t> </a:t>
+            </a:r>
+            <a:r>
+              <a:rPr lang="nn-NO" sz="2800" dirty="0" err="1">
+                <a:highlight>
+                  <a:srgbClr val="FFFFFF"/>
+                </a:highlight>
+              </a:rPr>
+              <a:t>een</a:t>
+            </a:r>
+            <a:r>
+              <a:rPr lang="nn-NO" sz="2800" dirty="0">
+                <a:highlight>
+                  <a:srgbClr val="FFFFFF"/>
+                </a:highlight>
+              </a:rPr>
+              <a:t> </a:t>
+            </a:r>
+            <a:r>
+              <a:rPr lang="nn-NO" sz="2800" dirty="0" err="1">
+                <a:highlight>
+                  <a:srgbClr val="FFFFFF"/>
+                </a:highlight>
+              </a:rPr>
+              <a:t>NwkKey</a:t>
+            </a:r>
+            <a:r>
+              <a:rPr lang="nn-NO" sz="2800" dirty="0">
+                <a:highlight>
+                  <a:srgbClr val="FFFFFF"/>
+                </a:highlight>
+              </a:rPr>
+              <a:t> </a:t>
+            </a:r>
+            <a:r>
+              <a:rPr lang="nn-NO" sz="2800" dirty="0" err="1">
+                <a:highlight>
+                  <a:srgbClr val="FFFFFF"/>
+                </a:highlight>
+              </a:rPr>
+              <a:t>nodig</a:t>
+            </a:r>
+            <a:r>
+              <a:rPr lang="nn-NO" sz="2800" dirty="0">
+                <a:highlight>
+                  <a:srgbClr val="FFFFFF"/>
+                </a:highlight>
+              </a:rPr>
+              <a:t> </a:t>
+            </a:r>
+            <a:r>
+              <a:rPr lang="nn-NO" sz="2800" dirty="0" err="1">
+                <a:highlight>
+                  <a:srgbClr val="FFFFFF"/>
+                </a:highlight>
+              </a:rPr>
+              <a:t>voor</a:t>
+            </a:r>
+            <a:r>
+              <a:rPr lang="nn-NO" sz="2800" dirty="0">
+                <a:highlight>
+                  <a:srgbClr val="FFFFFF"/>
+                </a:highlight>
+              </a:rPr>
+              <a:t> de </a:t>
+            </a:r>
+            <a:r>
+              <a:rPr lang="nn-NO" sz="2800" dirty="0" err="1">
+                <a:highlight>
+                  <a:srgbClr val="FFFFFF"/>
+                </a:highlight>
+              </a:rPr>
+              <a:t>netwerkbeveiliging</a:t>
+            </a:r>
+            <a:r>
+              <a:rPr lang="nn-NO" sz="2800" dirty="0">
+                <a:highlight>
+                  <a:srgbClr val="FFFFFF"/>
+                </a:highlight>
+              </a:rPr>
+              <a:t>. </a:t>
+            </a:r>
+          </a:p>
+          <a:p>
+            <a:pPr marL="0" indent="0">
+              <a:buNone/>
+            </a:pPr>
+            <a:endParaRPr lang="nn-NO" sz="2800" dirty="0">
+              <a:highlight>
+                <a:srgbClr val="FFFFFF"/>
+              </a:highlight>
+            </a:endParaRPr>
+          </a:p>
+          <a:p>
+            <a:pPr marL="0" indent="0">
+              <a:buNone/>
+            </a:pPr>
+            <a:r>
+              <a:rPr lang="nn-NO" sz="2800" dirty="0" err="1">
+                <a:highlight>
+                  <a:srgbClr val="FFFFFF"/>
+                </a:highlight>
+              </a:rPr>
+              <a:t>Waarom</a:t>
+            </a:r>
+            <a:r>
+              <a:rPr lang="nn-NO" sz="2800" dirty="0">
+                <a:highlight>
+                  <a:srgbClr val="FFFFFF"/>
+                </a:highlight>
+              </a:rPr>
+              <a:t> </a:t>
+            </a:r>
+            <a:r>
+              <a:rPr lang="nn-NO" sz="2800" dirty="0" err="1">
+                <a:highlight>
+                  <a:srgbClr val="FFFFFF"/>
+                </a:highlight>
+              </a:rPr>
+              <a:t>zijn</a:t>
+            </a:r>
+            <a:r>
+              <a:rPr lang="nn-NO" sz="2800" dirty="0">
+                <a:highlight>
+                  <a:srgbClr val="FFFFFF"/>
+                </a:highlight>
+              </a:rPr>
+              <a:t> </a:t>
+            </a:r>
+            <a:r>
+              <a:rPr lang="nn-NO" sz="2800" dirty="0" err="1">
+                <a:highlight>
+                  <a:srgbClr val="FFFFFF"/>
+                </a:highlight>
+              </a:rPr>
+              <a:t>deze</a:t>
+            </a:r>
+            <a:r>
+              <a:rPr lang="nn-NO" sz="2800" dirty="0">
+                <a:highlight>
+                  <a:srgbClr val="FFFFFF"/>
+                </a:highlight>
+              </a:rPr>
+              <a:t> </a:t>
+            </a:r>
+            <a:r>
+              <a:rPr lang="nn-NO" sz="2800" dirty="0" err="1">
+                <a:highlight>
+                  <a:srgbClr val="FFFFFF"/>
+                </a:highlight>
+              </a:rPr>
+              <a:t>belangrijk</a:t>
+            </a:r>
+            <a:r>
+              <a:rPr lang="nn-NO" sz="2800" dirty="0">
+                <a:highlight>
+                  <a:srgbClr val="FFFFFF"/>
+                </a:highlight>
+              </a:rPr>
+              <a:t>?</a:t>
+            </a:r>
+          </a:p>
+          <a:p>
+            <a:pPr marL="0" indent="0">
+              <a:buNone/>
+            </a:pPr>
+            <a:r>
+              <a:rPr lang="nn-NO" sz="2800" dirty="0">
+                <a:highlight>
+                  <a:srgbClr val="FFFFFF"/>
+                </a:highlight>
+              </a:rPr>
+              <a:t>Alleen </a:t>
+            </a:r>
+            <a:r>
+              <a:rPr lang="nn-NO" sz="2800" dirty="0" err="1">
+                <a:highlight>
+                  <a:srgbClr val="FFFFFF"/>
+                </a:highlight>
+              </a:rPr>
+              <a:t>als</a:t>
+            </a:r>
+            <a:r>
+              <a:rPr lang="nn-NO" sz="2800" dirty="0">
+                <a:highlight>
+                  <a:srgbClr val="FFFFFF"/>
+                </a:highlight>
+              </a:rPr>
+              <a:t> </a:t>
+            </a:r>
+            <a:r>
+              <a:rPr lang="nn-NO" sz="2800" dirty="0" err="1">
+                <a:highlight>
+                  <a:srgbClr val="FFFFFF"/>
+                </a:highlight>
+              </a:rPr>
+              <a:t>identifiers</a:t>
+            </a:r>
+            <a:r>
+              <a:rPr lang="nn-NO" sz="2800" dirty="0">
+                <a:highlight>
+                  <a:srgbClr val="FFFFFF"/>
+                </a:highlight>
+              </a:rPr>
+              <a:t>, </a:t>
+            </a:r>
+            <a:r>
+              <a:rPr lang="nn-NO" sz="2800" dirty="0" err="1">
+                <a:highlight>
+                  <a:srgbClr val="FFFFFF"/>
+                </a:highlight>
+              </a:rPr>
+              <a:t>LoRaWAN-versie</a:t>
+            </a:r>
+            <a:r>
+              <a:rPr lang="nn-NO" sz="2800" dirty="0">
+                <a:highlight>
+                  <a:srgbClr val="FFFFFF"/>
+                </a:highlight>
+              </a:rPr>
+              <a:t>, regionale parameters en </a:t>
+            </a:r>
+            <a:r>
+              <a:rPr lang="nn-NO" sz="2800" dirty="0" err="1">
+                <a:highlight>
+                  <a:srgbClr val="FFFFFF"/>
+                </a:highlight>
+              </a:rPr>
+              <a:t>keys</a:t>
+            </a:r>
+            <a:r>
+              <a:rPr lang="nn-NO" sz="2800" dirty="0">
+                <a:highlight>
+                  <a:srgbClr val="FFFFFF"/>
+                </a:highlight>
+              </a:rPr>
+              <a:t> </a:t>
+            </a:r>
+            <a:r>
+              <a:rPr lang="nn-NO" sz="2800" dirty="0" err="1">
+                <a:highlight>
+                  <a:srgbClr val="FFFFFF"/>
+                </a:highlight>
+              </a:rPr>
+              <a:t>precies</a:t>
+            </a:r>
+            <a:r>
+              <a:rPr lang="nn-NO" sz="2800" dirty="0">
+                <a:highlight>
+                  <a:srgbClr val="FFFFFF"/>
+                </a:highlight>
+              </a:rPr>
+              <a:t> </a:t>
+            </a:r>
+            <a:r>
+              <a:rPr lang="nn-NO" sz="2800" dirty="0" err="1">
+                <a:highlight>
+                  <a:srgbClr val="FFFFFF"/>
+                </a:highlight>
+              </a:rPr>
+              <a:t>overeenkomen</a:t>
+            </a:r>
+            <a:r>
+              <a:rPr lang="nn-NO" sz="2800" dirty="0">
+                <a:highlight>
+                  <a:srgbClr val="FFFFFF"/>
+                </a:highlight>
+              </a:rPr>
+              <a:t> tussen </a:t>
+            </a:r>
+            <a:r>
+              <a:rPr lang="nn-NO" sz="2800" dirty="0" err="1">
+                <a:highlight>
+                  <a:srgbClr val="FFFFFF"/>
+                </a:highlight>
+              </a:rPr>
+              <a:t>device</a:t>
+            </a:r>
+            <a:r>
+              <a:rPr lang="nn-NO" sz="2800" dirty="0">
+                <a:highlight>
+                  <a:srgbClr val="FFFFFF"/>
+                </a:highlight>
+              </a:rPr>
+              <a:t> en TTN, kan </a:t>
+            </a:r>
+            <a:r>
+              <a:rPr lang="nn-NO" sz="2800" dirty="0" err="1">
+                <a:highlight>
+                  <a:srgbClr val="FFFFFF"/>
+                </a:highlight>
+              </a:rPr>
+              <a:t>een</a:t>
+            </a:r>
+            <a:r>
+              <a:rPr lang="nn-NO" sz="2800" dirty="0">
+                <a:highlight>
+                  <a:srgbClr val="FFFFFF"/>
+                </a:highlight>
+              </a:rPr>
+              <a:t> </a:t>
+            </a:r>
+            <a:r>
+              <a:rPr lang="nn-NO" sz="2800" dirty="0" err="1">
+                <a:highlight>
+                  <a:srgbClr val="FFFFFF"/>
+                </a:highlight>
+              </a:rPr>
+              <a:t>device</a:t>
+            </a:r>
+            <a:r>
+              <a:rPr lang="nn-NO" sz="2800" dirty="0">
+                <a:highlight>
+                  <a:srgbClr val="FFFFFF"/>
+                </a:highlight>
+              </a:rPr>
+              <a:t> </a:t>
+            </a:r>
+            <a:r>
+              <a:rPr lang="nn-NO" sz="2800" dirty="0" err="1">
+                <a:highlight>
+                  <a:srgbClr val="FFFFFF"/>
+                </a:highlight>
+              </a:rPr>
+              <a:t>succesvol</a:t>
+            </a:r>
+            <a:r>
+              <a:rPr lang="nn-NO" sz="2800" dirty="0">
+                <a:highlight>
+                  <a:srgbClr val="FFFFFF"/>
+                </a:highlight>
+              </a:rPr>
+              <a:t> </a:t>
+            </a:r>
+            <a:r>
+              <a:rPr lang="nn-NO" sz="2800" dirty="0" err="1">
+                <a:highlight>
+                  <a:srgbClr val="FFFFFF"/>
+                </a:highlight>
+              </a:rPr>
+              <a:t>joinen</a:t>
+            </a:r>
+            <a:r>
+              <a:rPr lang="nn-NO" sz="2800" dirty="0">
+                <a:highlight>
+                  <a:srgbClr val="FFFFFF"/>
+                </a:highlight>
+              </a:rPr>
+              <a:t> en data </a:t>
+            </a:r>
+            <a:r>
+              <a:rPr lang="nn-NO" sz="2800" dirty="0" err="1">
+                <a:highlight>
+                  <a:srgbClr val="FFFFFF"/>
+                </a:highlight>
+              </a:rPr>
+              <a:t>uitwisselen</a:t>
+            </a:r>
+            <a:r>
+              <a:rPr lang="nn-NO" sz="2800" dirty="0">
+                <a:highlight>
+                  <a:srgbClr val="FFFFFF"/>
+                </a:highlight>
+              </a:rPr>
+              <a:t>.</a:t>
+            </a:r>
+          </a:p>
+        </p:txBody>
+      </p:sp>
+    </p:spTree>
+    <p:extLst>
+      <p:ext uri="{BB962C8B-B14F-4D97-AF65-F5344CB8AC3E}">
+        <p14:creationId xmlns:p14="http://schemas.microsoft.com/office/powerpoint/2010/main" val="1372879404"/>
+      </p:ext>
+    </p:extLst>
+  </p:cSld>
+  <p:clrMapOvr>
+    <a:masterClrMapping/>
+  </p:clrMapOvr>
+</p:sld>
+</file>
+
+<file path=ppt/slides/slide11.xml><?xml version="1.0" encoding="utf-8"?>
+<p:sld xmlns:a="http://schemas.openxmlformats.org/drawingml/2006/main" xmlns:r="http://schemas.openxmlformats.org/officeDocument/2006/relationships" xmlns:p="http://schemas.openxmlformats.org/presentationml/2006/main">
+  <p:cSld>
+    <p:spTree>
+      <p:nvGrpSpPr>
+        <p:cNvPr id="1" name=""/>
+        <p:cNvGrpSpPr/>
+        <p:nvPr/>
+      </p:nvGrpSpPr>
+      <p:grpSpPr>
+        <a:xfrm>
+          <a:off x="0" y="0"/>
+          <a:ext cx="0" cy="0"/>
+          <a:chOff x="0" y="0"/>
+          <a:chExt cx="0" cy="0"/>
+        </a:xfrm>
+      </p:grpSpPr>
+      <p:sp>
+        <p:nvSpPr>
+          <p:cNvPr id="2" name="Title 1">
+            <a:extLst>
+              <a:ext uri="{FF2B5EF4-FFF2-40B4-BE49-F238E27FC236}">
+                <a16:creationId xmlns:a16="http://schemas.microsoft.com/office/drawing/2014/main" id="{16E96D0F-E8D5-9303-3D9A-69282BA7814A}"/>
+              </a:ext>
+            </a:extLst>
+          </p:cNvPr>
+          <p:cNvSpPr>
+            <a:spLocks noGrp="1"/>
+          </p:cNvSpPr>
+          <p:nvPr>
+            <p:ph type="title"/>
+          </p:nvPr>
+        </p:nvSpPr>
+        <p:spPr/>
+        <p:txBody>
+          <a:bodyPr/>
+          <a:lstStyle/>
+          <a:p>
+            <a:r>
+              <a:rPr lang="en-US" dirty="0"/>
+              <a:t>Payload decoder</a:t>
+            </a:r>
+            <a:endParaRPr lang="en-NL" dirty="0"/>
+          </a:p>
+        </p:txBody>
+      </p:sp>
+      <p:sp>
+        <p:nvSpPr>
+          <p:cNvPr id="9" name="Tijdelijke aanduiding voor inhoud 8">
+            <a:extLst>
+              <a:ext uri="{FF2B5EF4-FFF2-40B4-BE49-F238E27FC236}">
+                <a16:creationId xmlns:a16="http://schemas.microsoft.com/office/drawing/2014/main" id="{CC9C8E59-173E-0620-2CA2-C760AF17CEE5}"/>
+              </a:ext>
+            </a:extLst>
+          </p:cNvPr>
+          <p:cNvSpPr>
+            <a:spLocks noGrp="1"/>
+          </p:cNvSpPr>
+          <p:nvPr>
+            <p:ph sz="quarter" idx="4"/>
+          </p:nvPr>
+        </p:nvSpPr>
+        <p:spPr>
+          <a:xfrm>
+            <a:off x="838200" y="1690688"/>
+            <a:ext cx="6232451" cy="4658575"/>
+          </a:xfrm>
+        </p:spPr>
+        <p:txBody>
+          <a:bodyPr>
+            <a:normAutofit/>
+          </a:bodyPr>
+          <a:lstStyle/>
+          <a:p>
+            <a:pPr marL="0" indent="0">
+              <a:buNone/>
+            </a:pPr>
+            <a:r>
+              <a:rPr lang="nl-NL" dirty="0"/>
+              <a:t>Een </a:t>
+            </a:r>
+            <a:r>
+              <a:rPr lang="nl-NL" dirty="0" err="1"/>
+              <a:t>LoRaWAN</a:t>
+            </a:r>
+            <a:r>
+              <a:rPr lang="nl-NL" dirty="0"/>
+              <a:t>-device verstuurt meestal een compact binair </a:t>
+            </a:r>
+            <a:r>
+              <a:rPr lang="nl-NL" dirty="0" err="1"/>
+              <a:t>payload</a:t>
+            </a:r>
+            <a:r>
+              <a:rPr lang="nl-NL" dirty="0"/>
+              <a:t>, bijvoorbeeld enkele bytes voor temperatuur, batterijspanning of luchtvochtigheid. Dat is efficiënt op de radioverbinding, maar voor mensen slecht leesbaar. In The </a:t>
+            </a:r>
+            <a:r>
+              <a:rPr lang="nl-NL" dirty="0" err="1"/>
+              <a:t>Things</a:t>
+            </a:r>
+            <a:r>
+              <a:rPr lang="nl-NL" dirty="0"/>
+              <a:t> Stack kun je daarom een </a:t>
+            </a:r>
+            <a:r>
+              <a:rPr lang="nl-NL" dirty="0" err="1"/>
+              <a:t>payload</a:t>
+            </a:r>
+            <a:r>
+              <a:rPr lang="nl-NL" dirty="0"/>
+              <a:t> </a:t>
+            </a:r>
+            <a:r>
+              <a:rPr lang="nl-NL" dirty="0" err="1"/>
+              <a:t>formatter</a:t>
+            </a:r>
+            <a:r>
+              <a:rPr lang="nl-NL" dirty="0"/>
+              <a:t> / decoder instellen. Die zet de ruwe bytes om naar een leesbaar JSON-object, zoals </a:t>
+            </a:r>
+            <a:r>
+              <a:rPr lang="nl-NL" i="1" dirty="0"/>
+              <a:t>{ "</a:t>
+            </a:r>
+            <a:r>
+              <a:rPr lang="nl-NL" i="1" dirty="0" err="1"/>
+              <a:t>temperature_c</a:t>
+            </a:r>
+            <a:r>
+              <a:rPr lang="nl-NL" i="1" dirty="0"/>
+              <a:t>": 21.8 }</a:t>
+            </a:r>
+            <a:r>
+              <a:rPr lang="nl-NL" dirty="0"/>
+              <a:t>.</a:t>
+            </a:r>
+          </a:p>
+        </p:txBody>
+      </p:sp>
+      <p:pic>
+        <p:nvPicPr>
+          <p:cNvPr id="17" name="Afbeelding 16" descr="Afbeelding met tekst, schermopname, software, Multimediasoftware&#10;&#10;Door AI gegenereerde inhoud is mogelijk onjuist.">
+            <a:extLst>
+              <a:ext uri="{FF2B5EF4-FFF2-40B4-BE49-F238E27FC236}">
+                <a16:creationId xmlns:a16="http://schemas.microsoft.com/office/drawing/2014/main" id="{B9831DC1-68EC-F677-F604-96E22ADFCC09}"/>
+              </a:ext>
+            </a:extLst>
+          </p:cNvPr>
+          <p:cNvPicPr>
+            <a:picLocks noChangeAspect="1"/>
+          </p:cNvPicPr>
+          <p:nvPr/>
+        </p:nvPicPr>
+        <p:blipFill>
+          <a:blip r:embed="rId2">
+            <a:extLst>
+              <a:ext uri="{28A0092B-C50C-407E-A947-70E740481C1C}">
+                <a14:useLocalDpi xmlns:a14="http://schemas.microsoft.com/office/drawing/2010/main" val="0"/>
+              </a:ext>
+            </a:extLst>
+          </a:blip>
+          <a:stretch>
+            <a:fillRect/>
+          </a:stretch>
+        </p:blipFill>
+        <p:spPr>
+          <a:xfrm>
+            <a:off x="7070651" y="1690688"/>
+            <a:ext cx="4871120" cy="4295442"/>
+          </a:xfrm>
+          <a:prstGeom prst="rect">
+            <a:avLst/>
+          </a:prstGeom>
+        </p:spPr>
+      </p:pic>
+    </p:spTree>
+    <p:extLst>
+      <p:ext uri="{BB962C8B-B14F-4D97-AF65-F5344CB8AC3E}">
+        <p14:creationId xmlns:p14="http://schemas.microsoft.com/office/powerpoint/2010/main" val="1358296989"/>
+      </p:ext>
+    </p:extLst>
+  </p:cSld>
+  <p:clrMapOvr>
+    <a:masterClrMapping/>
+  </p:clrMapOvr>
+</p:sld>
+</file>
+
+<file path=ppt/slides/slide12.xml><?xml version="1.0" encoding="utf-8"?>
+<p:sld xmlns:a="http://schemas.openxmlformats.org/drawingml/2006/main" xmlns:r="http://schemas.openxmlformats.org/officeDocument/2006/relationships" xmlns:p="http://schemas.openxmlformats.org/presentationml/2006/main">
+  <p:cSld>
+    <p:spTree>
+      <p:nvGrpSpPr>
+        <p:cNvPr id="1" name=""/>
+        <p:cNvGrpSpPr/>
+        <p:nvPr/>
+      </p:nvGrpSpPr>
+      <p:grpSpPr>
+        <a:xfrm>
+          <a:off x="0" y="0"/>
+          <a:ext cx="0" cy="0"/>
+          <a:chOff x="0" y="0"/>
+          <a:chExt cx="0" cy="0"/>
+        </a:xfrm>
+      </p:grpSpPr>
+      <p:sp>
+        <p:nvSpPr>
+          <p:cNvPr id="2" name="Title 1">
+            <a:extLst>
+              <a:ext uri="{FF2B5EF4-FFF2-40B4-BE49-F238E27FC236}">
+                <a16:creationId xmlns:a16="http://schemas.microsoft.com/office/drawing/2014/main" id="{ED86E016-5D62-B09E-AF3C-85136D836E48}"/>
+              </a:ext>
+            </a:extLst>
+          </p:cNvPr>
+          <p:cNvSpPr>
+            <a:spLocks noGrp="1"/>
+          </p:cNvSpPr>
+          <p:nvPr>
+            <p:ph type="title"/>
+          </p:nvPr>
+        </p:nvSpPr>
+        <p:spPr/>
+        <p:txBody>
+          <a:bodyPr/>
+          <a:lstStyle/>
+          <a:p>
+            <a:r>
+              <a:rPr lang="en-US" dirty="0"/>
+              <a:t>En dan nu.. Aan de slag!</a:t>
+            </a:r>
+            <a:endParaRPr lang="en-NL" dirty="0"/>
+          </a:p>
+        </p:txBody>
+      </p:sp>
+      <p:sp>
+        <p:nvSpPr>
+          <p:cNvPr id="3" name="Content Placeholder 2">
+            <a:extLst>
+              <a:ext uri="{FF2B5EF4-FFF2-40B4-BE49-F238E27FC236}">
+                <a16:creationId xmlns:a16="http://schemas.microsoft.com/office/drawing/2014/main" id="{BDAE17AB-7DC7-DDDA-C33E-2F6219D15F37}"/>
+              </a:ext>
+            </a:extLst>
+          </p:cNvPr>
+          <p:cNvSpPr>
+            <a:spLocks noGrp="1"/>
+          </p:cNvSpPr>
+          <p:nvPr>
+            <p:ph idx="1"/>
+          </p:nvPr>
+        </p:nvSpPr>
+        <p:spPr/>
+        <p:txBody>
+          <a:bodyPr/>
+          <a:lstStyle/>
+          <a:p>
+            <a:r>
+              <a:rPr lang="en-US" dirty="0" err="1"/>
+              <a:t>Configureer</a:t>
+            </a:r>
+            <a:r>
+              <a:rPr lang="en-US" dirty="0"/>
+              <a:t> je module op de Raspberry Pi Pico W</a:t>
+            </a:r>
+          </a:p>
+          <a:p>
+            <a:endParaRPr lang="en-US" dirty="0"/>
+          </a:p>
+          <a:p>
+            <a:r>
+              <a:rPr lang="en-US" dirty="0" err="1"/>
+              <a:t>Verstuur</a:t>
+            </a:r>
+            <a:r>
+              <a:rPr lang="en-US" dirty="0"/>
+              <a:t> data </a:t>
+            </a:r>
+            <a:r>
+              <a:rPr lang="en-US" dirty="0" err="1"/>
+              <a:t>naar</a:t>
+            </a:r>
+            <a:r>
+              <a:rPr lang="en-US" dirty="0"/>
+              <a:t> het TTN platform</a:t>
+            </a:r>
+          </a:p>
+        </p:txBody>
+      </p:sp>
+    </p:spTree>
+    <p:extLst>
+      <p:ext uri="{BB962C8B-B14F-4D97-AF65-F5344CB8AC3E}">
+        <p14:creationId xmlns:p14="http://schemas.microsoft.com/office/powerpoint/2010/main" val="2067029959"/>
+      </p:ext>
+    </p:extLst>
+  </p:cSld>
+  <p:clrMapOvr>
+    <a:masterClrMapping/>
+  </p:clrMapOvr>
+</p:sld>
+</file>
+
 <file path=ppt/slides/slide2.xml><?xml version="1.0" encoding="utf-8"?>
 <p:sld xmlns:a="http://schemas.openxmlformats.org/drawingml/2006/main" xmlns:r="http://schemas.openxmlformats.org/officeDocument/2006/relationships" xmlns:p="http://schemas.openxmlformats.org/presentationml/2006/main">
   <p:cSld>
@@ -4566,6 +6737,1112 @@
         <p:cNvPr id="1" name="">
           <a:extLst>
             <a:ext uri="{FF2B5EF4-FFF2-40B4-BE49-F238E27FC236}">
+              <a16:creationId xmlns:a16="http://schemas.microsoft.com/office/drawing/2014/main" id="{351E4285-9E74-A236-8DDA-513CB654D008}"/>
+            </a:ext>
+          </a:extLst>
+        </p:cNvPr>
+        <p:cNvGrpSpPr/>
+        <p:nvPr/>
+      </p:nvGrpSpPr>
+      <p:grpSpPr>
+        <a:xfrm>
+          <a:off x="0" y="0"/>
+          <a:ext cx="0" cy="0"/>
+          <a:chOff x="0" y="0"/>
+          <a:chExt cx="0" cy="0"/>
+        </a:xfrm>
+      </p:grpSpPr>
+      <p:sp>
+        <p:nvSpPr>
+          <p:cNvPr id="2" name="Title 1">
+            <a:extLst>
+              <a:ext uri="{FF2B5EF4-FFF2-40B4-BE49-F238E27FC236}">
+                <a16:creationId xmlns:a16="http://schemas.microsoft.com/office/drawing/2014/main" id="{73B05D05-EF81-FEEF-4D20-8556CD7A902E}"/>
+              </a:ext>
+            </a:extLst>
+          </p:cNvPr>
+          <p:cNvSpPr>
+            <a:spLocks noGrp="1"/>
+          </p:cNvSpPr>
+          <p:nvPr>
+            <p:ph type="title"/>
+          </p:nvPr>
+        </p:nvSpPr>
+        <p:spPr/>
+        <p:txBody>
+          <a:bodyPr/>
+          <a:lstStyle/>
+          <a:p>
+            <a:r>
+              <a:rPr lang="en-US" dirty="0" err="1"/>
+              <a:t>Bandbreedte</a:t>
+            </a:r>
+            <a:r>
+              <a:rPr lang="en-US" dirty="0"/>
+              <a:t> versus </a:t>
+            </a:r>
+            <a:r>
+              <a:rPr lang="en-US" dirty="0" err="1"/>
+              <a:t>bereik</a:t>
+            </a:r>
+            <a:endParaRPr lang="en-NL" dirty="0"/>
+          </a:p>
+        </p:txBody>
+      </p:sp>
+      <p:pic>
+        <p:nvPicPr>
+          <p:cNvPr id="5" name="Afbeelding 4">
+            <a:extLst>
+              <a:ext uri="{FF2B5EF4-FFF2-40B4-BE49-F238E27FC236}">
+                <a16:creationId xmlns:a16="http://schemas.microsoft.com/office/drawing/2014/main" id="{301C0034-B09B-FA47-23EB-860260A42395}"/>
+              </a:ext>
+            </a:extLst>
+          </p:cNvPr>
+          <p:cNvPicPr>
+            <a:picLocks noChangeAspect="1"/>
+          </p:cNvPicPr>
+          <p:nvPr/>
+        </p:nvPicPr>
+        <p:blipFill>
+          <a:blip r:embed="rId3">
+            <a:extLst>
+              <a:ext uri="{28A0092B-C50C-407E-A947-70E740481C1C}">
+                <a14:useLocalDpi xmlns:a14="http://schemas.microsoft.com/office/drawing/2010/main" val="0"/>
+              </a:ext>
+            </a:extLst>
+          </a:blip>
+          <a:stretch>
+            <a:fillRect/>
+          </a:stretch>
+        </p:blipFill>
+        <p:spPr>
+          <a:xfrm>
+            <a:off x="2286000" y="1524000"/>
+            <a:ext cx="7620000" cy="3810000"/>
+          </a:xfrm>
+          <a:prstGeom prst="rect">
+            <a:avLst/>
+          </a:prstGeom>
+        </p:spPr>
+      </p:pic>
+      <p:sp>
+        <p:nvSpPr>
+          <p:cNvPr id="6" name="Tekstvak 5">
+            <a:extLst>
+              <a:ext uri="{FF2B5EF4-FFF2-40B4-BE49-F238E27FC236}">
+                <a16:creationId xmlns:a16="http://schemas.microsoft.com/office/drawing/2014/main" id="{818869BC-EE93-3BE5-6DC3-ED974BF54BB1}"/>
+              </a:ext>
+            </a:extLst>
+          </p:cNvPr>
+          <p:cNvSpPr txBox="1"/>
+          <p:nvPr/>
+        </p:nvSpPr>
+        <p:spPr>
+          <a:xfrm>
+            <a:off x="3672590" y="5334000"/>
+            <a:ext cx="3575979" cy="369332"/>
+          </a:xfrm>
+          <a:prstGeom prst="rect">
+            <a:avLst/>
+          </a:prstGeom>
+          <a:noFill/>
+        </p:spPr>
+        <p:txBody>
+          <a:bodyPr wrap="none" rtlCol="0">
+            <a:spAutoFit/>
+          </a:bodyPr>
+          <a:lstStyle/>
+          <a:p>
+            <a:r>
+              <a:rPr lang="nl-NL" dirty="0"/>
+              <a:t>Image source: The </a:t>
+            </a:r>
+            <a:r>
+              <a:rPr lang="nl-NL" dirty="0" err="1"/>
+              <a:t>Things</a:t>
+            </a:r>
+            <a:r>
+              <a:rPr lang="nl-NL" dirty="0"/>
+              <a:t> Network</a:t>
+            </a:r>
+          </a:p>
+        </p:txBody>
+      </p:sp>
+    </p:spTree>
+    <p:extLst>
+      <p:ext uri="{BB962C8B-B14F-4D97-AF65-F5344CB8AC3E}">
+        <p14:creationId xmlns:p14="http://schemas.microsoft.com/office/powerpoint/2010/main" val="2383492302"/>
+      </p:ext>
+    </p:extLst>
+  </p:cSld>
+  <p:clrMapOvr>
+    <a:masterClrMapping/>
+  </p:clrMapOvr>
+</p:sld>
+</file>
+
+<file path=ppt/slides/slide6.xml><?xml version="1.0" encoding="utf-8"?>
+<p:sld xmlns:a="http://schemas.openxmlformats.org/drawingml/2006/main" xmlns:r="http://schemas.openxmlformats.org/officeDocument/2006/relationships" xmlns:p="http://schemas.openxmlformats.org/presentationml/2006/main">
+  <p:cSld>
+    <p:spTree>
+      <p:nvGrpSpPr>
+        <p:cNvPr id="1" name="">
+          <a:extLst>
+            <a:ext uri="{FF2B5EF4-FFF2-40B4-BE49-F238E27FC236}">
+              <a16:creationId xmlns:a16="http://schemas.microsoft.com/office/drawing/2014/main" id="{C02F4ABE-CA0C-264D-D4CA-A010136D456A}"/>
+            </a:ext>
+          </a:extLst>
+        </p:cNvPr>
+        <p:cNvGrpSpPr/>
+        <p:nvPr/>
+      </p:nvGrpSpPr>
+      <p:grpSpPr>
+        <a:xfrm>
+          <a:off x="0" y="0"/>
+          <a:ext cx="0" cy="0"/>
+          <a:chOff x="0" y="0"/>
+          <a:chExt cx="0" cy="0"/>
+        </a:xfrm>
+      </p:grpSpPr>
+      <p:sp>
+        <p:nvSpPr>
+          <p:cNvPr id="2" name="Title 1">
+            <a:extLst>
+              <a:ext uri="{FF2B5EF4-FFF2-40B4-BE49-F238E27FC236}">
+                <a16:creationId xmlns:a16="http://schemas.microsoft.com/office/drawing/2014/main" id="{C1033ADF-AC89-5577-D551-90585E48A333}"/>
+              </a:ext>
+            </a:extLst>
+          </p:cNvPr>
+          <p:cNvSpPr>
+            <a:spLocks noGrp="1"/>
+          </p:cNvSpPr>
+          <p:nvPr>
+            <p:ph type="title"/>
+          </p:nvPr>
+        </p:nvSpPr>
+        <p:spPr/>
+        <p:txBody>
+          <a:bodyPr/>
+          <a:lstStyle/>
+          <a:p>
+            <a:r>
+              <a:rPr lang="nl-NL" dirty="0"/>
+              <a:t>Radio-eigenschappen</a:t>
+            </a:r>
+            <a:endParaRPr lang="en-NL" dirty="0"/>
+          </a:p>
+        </p:txBody>
+      </p:sp>
+      <p:sp>
+        <p:nvSpPr>
+          <p:cNvPr id="7" name="Content Placeholder 2">
+            <a:extLst>
+              <a:ext uri="{FF2B5EF4-FFF2-40B4-BE49-F238E27FC236}">
+                <a16:creationId xmlns:a16="http://schemas.microsoft.com/office/drawing/2014/main" id="{B53682CC-FEA2-17E6-7DB7-EE1475DD19F8}"/>
+              </a:ext>
+            </a:extLst>
+          </p:cNvPr>
+          <p:cNvSpPr>
+            <a:spLocks noGrp="1"/>
+          </p:cNvSpPr>
+          <p:nvPr>
+            <p:ph idx="1"/>
+          </p:nvPr>
+        </p:nvSpPr>
+        <p:spPr>
+          <a:xfrm>
+            <a:off x="838200" y="1825625"/>
+            <a:ext cx="10515600" cy="4351338"/>
+          </a:xfrm>
+        </p:spPr>
+        <p:txBody>
+          <a:bodyPr>
+            <a:normAutofit lnSpcReduction="10000"/>
+          </a:bodyPr>
+          <a:lstStyle/>
+          <a:p>
+            <a:r>
+              <a:rPr lang="en-US" b="1" dirty="0"/>
+              <a:t>Spreading Factor </a:t>
+            </a:r>
+            <a:r>
+              <a:rPr lang="en-US" dirty="0"/>
+              <a:t>(SF) </a:t>
+            </a:r>
+            <a:r>
+              <a:rPr lang="en-US" dirty="0" err="1"/>
+              <a:t>bepaalt</a:t>
+            </a:r>
+            <a:r>
+              <a:rPr lang="en-US" dirty="0"/>
+              <a:t> hoe “</a:t>
+            </a:r>
+            <a:r>
+              <a:rPr lang="en-US" dirty="0" err="1"/>
+              <a:t>langzaam</a:t>
+            </a:r>
+            <a:r>
+              <a:rPr lang="en-US" dirty="0"/>
+              <a:t> </a:t>
+            </a:r>
+            <a:r>
+              <a:rPr lang="en-US" dirty="0" err="1"/>
+              <a:t>en</a:t>
+            </a:r>
+            <a:r>
+              <a:rPr lang="en-US" dirty="0"/>
+              <a:t> </a:t>
+            </a:r>
+            <a:r>
+              <a:rPr lang="en-US" dirty="0" err="1"/>
+              <a:t>robuust</a:t>
+            </a:r>
+            <a:r>
+              <a:rPr lang="en-US" dirty="0"/>
+              <a:t>” </a:t>
+            </a:r>
+            <a:r>
+              <a:rPr lang="en-US" dirty="0" err="1"/>
+              <a:t>een</a:t>
+            </a:r>
+            <a:r>
+              <a:rPr lang="en-US" dirty="0"/>
+              <a:t> LoRa-</a:t>
+            </a:r>
+            <a:r>
+              <a:rPr lang="en-US" dirty="0" err="1"/>
+              <a:t>bericht</a:t>
+            </a:r>
+            <a:r>
+              <a:rPr lang="en-US" dirty="0"/>
+              <a:t> </a:t>
+            </a:r>
+            <a:r>
+              <a:rPr lang="en-US" dirty="0" err="1"/>
+              <a:t>wordt</a:t>
+            </a:r>
+            <a:r>
+              <a:rPr lang="en-US" dirty="0"/>
+              <a:t> </a:t>
+            </a:r>
+            <a:r>
+              <a:rPr lang="en-US" dirty="0" err="1"/>
+              <a:t>verzonden</a:t>
+            </a:r>
+            <a:r>
+              <a:rPr lang="en-US" dirty="0"/>
+              <a:t>. In LoRa </a:t>
+            </a:r>
+            <a:r>
+              <a:rPr lang="en-US" dirty="0" err="1"/>
+              <a:t>zijn</a:t>
+            </a:r>
+            <a:r>
+              <a:rPr lang="en-US" dirty="0"/>
+              <a:t> er </a:t>
+            </a:r>
+            <a:r>
+              <a:rPr lang="en-US" dirty="0" err="1"/>
+              <a:t>normaal</a:t>
+            </a:r>
+            <a:r>
+              <a:rPr lang="en-US" dirty="0"/>
+              <a:t> SF7 t/m SF12. Een </a:t>
+            </a:r>
+            <a:r>
+              <a:rPr lang="en-US" dirty="0" err="1"/>
+              <a:t>hogere</a:t>
+            </a:r>
+            <a:r>
+              <a:rPr lang="en-US" dirty="0"/>
+              <a:t> SF </a:t>
+            </a:r>
+            <a:r>
+              <a:rPr lang="en-US" dirty="0" err="1"/>
+              <a:t>geeft</a:t>
+            </a:r>
+            <a:r>
+              <a:rPr lang="en-US" dirty="0"/>
+              <a:t> </a:t>
+            </a:r>
+            <a:r>
+              <a:rPr lang="en-US" dirty="0" err="1"/>
+              <a:t>meestal</a:t>
+            </a:r>
+            <a:r>
+              <a:rPr lang="en-US" dirty="0"/>
+              <a:t> </a:t>
+            </a:r>
+            <a:r>
+              <a:rPr lang="en-US" dirty="0" err="1"/>
+              <a:t>meer</a:t>
+            </a:r>
+            <a:r>
+              <a:rPr lang="en-US" dirty="0"/>
+              <a:t> </a:t>
+            </a:r>
+            <a:r>
+              <a:rPr lang="en-US" dirty="0" err="1"/>
+              <a:t>bereik</a:t>
+            </a:r>
+            <a:r>
+              <a:rPr lang="en-US" dirty="0"/>
+              <a:t> </a:t>
+            </a:r>
+            <a:r>
+              <a:rPr lang="en-US" dirty="0" err="1"/>
+              <a:t>en</a:t>
+            </a:r>
+            <a:r>
+              <a:rPr lang="en-US" dirty="0"/>
+              <a:t> </a:t>
+            </a:r>
+            <a:r>
+              <a:rPr lang="en-US" dirty="0" err="1"/>
+              <a:t>betere</a:t>
+            </a:r>
+            <a:r>
+              <a:rPr lang="en-US" dirty="0"/>
+              <a:t> </a:t>
+            </a:r>
+            <a:r>
+              <a:rPr lang="en-US" dirty="0" err="1"/>
+              <a:t>ontvangergevoeligheid</a:t>
+            </a:r>
+            <a:r>
+              <a:rPr lang="en-US" dirty="0"/>
+              <a:t>, maar </a:t>
+            </a:r>
+            <a:r>
+              <a:rPr lang="en-US" dirty="0" err="1"/>
+              <a:t>ook</a:t>
+            </a:r>
+            <a:r>
+              <a:rPr lang="en-US" dirty="0"/>
+              <a:t> </a:t>
+            </a:r>
+            <a:r>
+              <a:rPr lang="en-US" dirty="0" err="1"/>
+              <a:t>lagere</a:t>
+            </a:r>
+            <a:r>
+              <a:rPr lang="en-US" dirty="0"/>
+              <a:t> </a:t>
+            </a:r>
+            <a:r>
+              <a:rPr lang="en-US" dirty="0" err="1"/>
+              <a:t>datasnelheid</a:t>
+            </a:r>
+            <a:r>
+              <a:rPr lang="en-US" dirty="0"/>
+              <a:t>, </a:t>
+            </a:r>
+            <a:r>
+              <a:rPr lang="en-US" dirty="0" err="1"/>
+              <a:t>langere</a:t>
+            </a:r>
+            <a:r>
+              <a:rPr lang="en-US" dirty="0"/>
+              <a:t> airtime </a:t>
+            </a:r>
+            <a:r>
+              <a:rPr lang="en-US" dirty="0" err="1"/>
+              <a:t>en</a:t>
+            </a:r>
+            <a:r>
+              <a:rPr lang="en-US" dirty="0"/>
+              <a:t> </a:t>
+            </a:r>
+            <a:r>
+              <a:rPr lang="en-US" dirty="0" err="1"/>
+              <a:t>dus</a:t>
+            </a:r>
+            <a:r>
+              <a:rPr lang="en-US" dirty="0"/>
+              <a:t> </a:t>
+            </a:r>
+            <a:r>
+              <a:rPr lang="en-US" dirty="0" err="1"/>
+              <a:t>vaak</a:t>
+            </a:r>
+            <a:r>
+              <a:rPr lang="en-US" dirty="0"/>
+              <a:t> </a:t>
+            </a:r>
+            <a:r>
+              <a:rPr lang="en-US" dirty="0" err="1"/>
+              <a:t>meer</a:t>
+            </a:r>
+            <a:r>
+              <a:rPr lang="en-US" dirty="0"/>
+              <a:t> </a:t>
+            </a:r>
+            <a:r>
+              <a:rPr lang="en-US" dirty="0" err="1"/>
+              <a:t>energieverbruik</a:t>
+            </a:r>
+            <a:r>
+              <a:rPr lang="en-US" dirty="0"/>
+              <a:t>.</a:t>
+            </a:r>
+          </a:p>
+          <a:p>
+            <a:r>
+              <a:rPr lang="en-US" b="1" dirty="0"/>
+              <a:t>RSSI</a:t>
+            </a:r>
+            <a:r>
+              <a:rPr lang="en-US" dirty="0"/>
+              <a:t> (Received Signal Strength Indicator) </a:t>
+            </a:r>
+            <a:r>
+              <a:rPr lang="en-US" dirty="0" err="1"/>
+              <a:t>geeft</a:t>
+            </a:r>
+            <a:r>
+              <a:rPr lang="en-US" dirty="0"/>
+              <a:t> </a:t>
+            </a:r>
+            <a:r>
+              <a:rPr lang="en-US" dirty="0" err="1"/>
+              <a:t>aan</a:t>
+            </a:r>
+            <a:r>
+              <a:rPr lang="en-US" dirty="0"/>
+              <a:t> hoe </a:t>
+            </a:r>
+            <a:r>
+              <a:rPr lang="en-US" dirty="0" err="1"/>
+              <a:t>sterk</a:t>
+            </a:r>
+            <a:r>
+              <a:rPr lang="en-US" dirty="0"/>
+              <a:t> het </a:t>
+            </a:r>
+            <a:r>
+              <a:rPr lang="en-US" dirty="0" err="1"/>
+              <a:t>ontvangen</a:t>
+            </a:r>
+            <a:r>
+              <a:rPr lang="en-US" dirty="0"/>
+              <a:t> </a:t>
+            </a:r>
+            <a:r>
+              <a:rPr lang="en-US" dirty="0" err="1"/>
+              <a:t>signaal</a:t>
+            </a:r>
+            <a:r>
+              <a:rPr lang="en-US" dirty="0"/>
+              <a:t> is </a:t>
+            </a:r>
+            <a:r>
+              <a:rPr lang="en-US" dirty="0" err="1"/>
+              <a:t>en</a:t>
+            </a:r>
+            <a:r>
+              <a:rPr lang="en-US" dirty="0"/>
+              <a:t> </a:t>
+            </a:r>
+            <a:r>
+              <a:rPr lang="en-US" dirty="0" err="1"/>
+              <a:t>wordt</a:t>
+            </a:r>
+            <a:r>
+              <a:rPr lang="en-US" dirty="0"/>
+              <a:t> </a:t>
+            </a:r>
+            <a:r>
+              <a:rPr lang="en-US" dirty="0" err="1"/>
+              <a:t>uitgedrukt</a:t>
+            </a:r>
+            <a:r>
+              <a:rPr lang="en-US" dirty="0"/>
+              <a:t> in dBm. De </a:t>
+            </a:r>
+            <a:r>
+              <a:rPr lang="en-US" dirty="0" err="1"/>
+              <a:t>waarde</a:t>
+            </a:r>
+            <a:r>
+              <a:rPr lang="en-US" dirty="0"/>
+              <a:t> is </a:t>
+            </a:r>
+            <a:r>
+              <a:rPr lang="en-US" dirty="0" err="1"/>
+              <a:t>meestal</a:t>
+            </a:r>
+            <a:r>
+              <a:rPr lang="en-US" dirty="0"/>
+              <a:t> </a:t>
+            </a:r>
+            <a:r>
+              <a:rPr lang="en-US" dirty="0" err="1"/>
+              <a:t>negatief</a:t>
+            </a:r>
+            <a:r>
+              <a:rPr lang="en-US" dirty="0"/>
+              <a:t>: hoe </a:t>
+            </a:r>
+            <a:r>
+              <a:rPr lang="en-US" dirty="0" err="1"/>
+              <a:t>dichter</a:t>
+            </a:r>
+            <a:r>
+              <a:rPr lang="en-US" dirty="0"/>
+              <a:t> </a:t>
+            </a:r>
+            <a:r>
+              <a:rPr lang="en-US" dirty="0" err="1"/>
+              <a:t>bij</a:t>
+            </a:r>
+            <a:r>
+              <a:rPr lang="en-US" dirty="0"/>
+              <a:t> 0, hoe </a:t>
+            </a:r>
+            <a:r>
+              <a:rPr lang="en-US" dirty="0" err="1"/>
+              <a:t>sterker</a:t>
+            </a:r>
+            <a:r>
+              <a:rPr lang="en-US" dirty="0"/>
+              <a:t> het </a:t>
+            </a:r>
+            <a:r>
+              <a:rPr lang="en-US" dirty="0" err="1"/>
+              <a:t>signaal</a:t>
+            </a:r>
+            <a:r>
+              <a:rPr lang="en-US" dirty="0"/>
+              <a:t>. </a:t>
+            </a:r>
+            <a:r>
+              <a:rPr lang="en-US" b="1" dirty="0"/>
+              <a:t>SNR</a:t>
+            </a:r>
+            <a:r>
+              <a:rPr lang="en-US" dirty="0"/>
+              <a:t> (Signal-to-Noise Ratio) </a:t>
+            </a:r>
+            <a:r>
+              <a:rPr lang="en-US" dirty="0" err="1"/>
+              <a:t>vergelijkt</a:t>
+            </a:r>
+            <a:r>
+              <a:rPr lang="en-US" dirty="0"/>
+              <a:t> het </a:t>
+            </a:r>
+            <a:r>
+              <a:rPr lang="en-US" dirty="0" err="1"/>
+              <a:t>signaal</a:t>
+            </a:r>
+            <a:r>
+              <a:rPr lang="en-US" dirty="0"/>
+              <a:t> met de </a:t>
+            </a:r>
+            <a:r>
+              <a:rPr lang="en-US" dirty="0" err="1"/>
+              <a:t>ruisvloer</a:t>
+            </a:r>
+            <a:r>
+              <a:rPr lang="en-US" dirty="0"/>
+              <a:t> </a:t>
+            </a:r>
+            <a:r>
+              <a:rPr lang="en-US" dirty="0" err="1"/>
+              <a:t>en</a:t>
+            </a:r>
+            <a:r>
+              <a:rPr lang="en-US" dirty="0"/>
+              <a:t> </a:t>
+            </a:r>
+            <a:r>
+              <a:rPr lang="en-US" dirty="0" err="1"/>
+              <a:t>wordt</a:t>
+            </a:r>
+            <a:r>
+              <a:rPr lang="en-US" dirty="0"/>
+              <a:t> </a:t>
+            </a:r>
+            <a:r>
+              <a:rPr lang="en-US" dirty="0" err="1"/>
+              <a:t>uitgedrukt</a:t>
+            </a:r>
+            <a:r>
+              <a:rPr lang="en-US" dirty="0"/>
+              <a:t> in </a:t>
+            </a:r>
+            <a:r>
+              <a:rPr lang="en-US" dirty="0" err="1"/>
+              <a:t>dB.</a:t>
+            </a:r>
+            <a:r>
+              <a:rPr lang="en-US" dirty="0"/>
+              <a:t> Een </a:t>
+            </a:r>
+            <a:r>
+              <a:rPr lang="en-US" dirty="0" err="1"/>
+              <a:t>hogere</a:t>
+            </a:r>
+            <a:r>
+              <a:rPr lang="en-US" dirty="0"/>
+              <a:t> SNR </a:t>
+            </a:r>
+            <a:r>
+              <a:rPr lang="en-US" dirty="0" err="1"/>
+              <a:t>betekent</a:t>
+            </a:r>
+            <a:r>
+              <a:rPr lang="en-US" dirty="0"/>
+              <a:t> </a:t>
+            </a:r>
+            <a:r>
+              <a:rPr lang="en-US" dirty="0" err="1"/>
+              <a:t>doorgaans</a:t>
+            </a:r>
+            <a:r>
+              <a:rPr lang="en-US" dirty="0"/>
+              <a:t> </a:t>
+            </a:r>
+            <a:r>
+              <a:rPr lang="en-US" dirty="0" err="1"/>
+              <a:t>dat</a:t>
+            </a:r>
+            <a:r>
+              <a:rPr lang="en-US" dirty="0"/>
+              <a:t> het </a:t>
+            </a:r>
+            <a:r>
+              <a:rPr lang="en-US" dirty="0" err="1"/>
+              <a:t>signaal</a:t>
+            </a:r>
+            <a:r>
+              <a:rPr lang="en-US" dirty="0"/>
+              <a:t> </a:t>
+            </a:r>
+            <a:r>
+              <a:rPr lang="en-US" dirty="0" err="1"/>
+              <a:t>duidelijker</a:t>
+            </a:r>
+            <a:r>
+              <a:rPr lang="en-US" dirty="0"/>
+              <a:t> </a:t>
+            </a:r>
+            <a:r>
+              <a:rPr lang="en-US" dirty="0" err="1"/>
+              <a:t>boven</a:t>
+            </a:r>
+            <a:r>
+              <a:rPr lang="en-US" dirty="0"/>
+              <a:t> de </a:t>
+            </a:r>
+            <a:r>
+              <a:rPr lang="en-US" dirty="0" err="1"/>
+              <a:t>ruis</a:t>
+            </a:r>
+            <a:r>
+              <a:rPr lang="en-US" dirty="0"/>
+              <a:t> </a:t>
+            </a:r>
+            <a:r>
+              <a:rPr lang="en-US" dirty="0" err="1"/>
+              <a:t>uitkomt</a:t>
+            </a:r>
+            <a:r>
+              <a:rPr lang="en-US" dirty="0"/>
+              <a:t>.</a:t>
+            </a:r>
+          </a:p>
+        </p:txBody>
+      </p:sp>
+    </p:spTree>
+    <p:extLst>
+      <p:ext uri="{BB962C8B-B14F-4D97-AF65-F5344CB8AC3E}">
+        <p14:creationId xmlns:p14="http://schemas.microsoft.com/office/powerpoint/2010/main" val="2119648123"/>
+      </p:ext>
+    </p:extLst>
+  </p:cSld>
+  <p:clrMapOvr>
+    <a:masterClrMapping/>
+  </p:clrMapOvr>
+</p:sld>
+</file>
+
+<file path=ppt/slides/slide7.xml><?xml version="1.0" encoding="utf-8"?>
+<p:sld xmlns:a="http://schemas.openxmlformats.org/drawingml/2006/main" xmlns:r="http://schemas.openxmlformats.org/officeDocument/2006/relationships" xmlns:p="http://schemas.openxmlformats.org/presentationml/2006/main">
+  <p:cSld>
+    <p:spTree>
+      <p:nvGrpSpPr>
+        <p:cNvPr id="1" name="">
+          <a:extLst>
+            <a:ext uri="{FF2B5EF4-FFF2-40B4-BE49-F238E27FC236}">
+              <a16:creationId xmlns:a16="http://schemas.microsoft.com/office/drawing/2014/main" id="{1DC22FCD-77DF-0977-0239-34D867432984}"/>
+            </a:ext>
+          </a:extLst>
+        </p:cNvPr>
+        <p:cNvGrpSpPr/>
+        <p:nvPr/>
+      </p:nvGrpSpPr>
+      <p:grpSpPr>
+        <a:xfrm>
+          <a:off x="0" y="0"/>
+          <a:ext cx="0" cy="0"/>
+          <a:chOff x="0" y="0"/>
+          <a:chExt cx="0" cy="0"/>
+        </a:xfrm>
+      </p:grpSpPr>
+      <p:sp>
+        <p:nvSpPr>
+          <p:cNvPr id="2" name="Title 1">
+            <a:extLst>
+              <a:ext uri="{FF2B5EF4-FFF2-40B4-BE49-F238E27FC236}">
+                <a16:creationId xmlns:a16="http://schemas.microsoft.com/office/drawing/2014/main" id="{4DFCF2CC-D0B7-233F-7895-F01D7844E964}"/>
+              </a:ext>
+            </a:extLst>
+          </p:cNvPr>
+          <p:cNvSpPr>
+            <a:spLocks noGrp="1"/>
+          </p:cNvSpPr>
+          <p:nvPr>
+            <p:ph type="title"/>
+          </p:nvPr>
+        </p:nvSpPr>
+        <p:spPr/>
+        <p:txBody>
+          <a:bodyPr/>
+          <a:lstStyle/>
+          <a:p>
+            <a:r>
+              <a:rPr lang="nl-NL" dirty="0"/>
+              <a:t>868 MHz en regelgeving</a:t>
+            </a:r>
+            <a:endParaRPr lang="en-NL" dirty="0"/>
+          </a:p>
+        </p:txBody>
+      </p:sp>
+      <p:sp>
+        <p:nvSpPr>
+          <p:cNvPr id="7" name="Content Placeholder 2">
+            <a:extLst>
+              <a:ext uri="{FF2B5EF4-FFF2-40B4-BE49-F238E27FC236}">
+                <a16:creationId xmlns:a16="http://schemas.microsoft.com/office/drawing/2014/main" id="{EF029BE1-D4B5-4D5A-B920-FD63B536A416}"/>
+              </a:ext>
+            </a:extLst>
+          </p:cNvPr>
+          <p:cNvSpPr>
+            <a:spLocks noGrp="1"/>
+          </p:cNvSpPr>
+          <p:nvPr>
+            <p:ph idx="1"/>
+          </p:nvPr>
+        </p:nvSpPr>
+        <p:spPr>
+          <a:xfrm>
+            <a:off x="838200" y="1825625"/>
+            <a:ext cx="10515600" cy="4351338"/>
+          </a:xfrm>
+        </p:spPr>
+        <p:txBody>
+          <a:bodyPr>
+            <a:normAutofit/>
+          </a:bodyPr>
+          <a:lstStyle/>
+          <a:p>
+            <a:r>
+              <a:rPr lang="en-US" dirty="0"/>
+              <a:t>In Europa </a:t>
+            </a:r>
+            <a:r>
+              <a:rPr lang="en-US" dirty="0" err="1"/>
+              <a:t>gebruikt</a:t>
+            </a:r>
+            <a:r>
+              <a:rPr lang="en-US" dirty="0"/>
+              <a:t> </a:t>
+            </a:r>
+            <a:r>
+              <a:rPr lang="en-US" dirty="0" err="1"/>
+              <a:t>LoRaWAN</a:t>
+            </a:r>
+            <a:r>
+              <a:rPr lang="en-US" dirty="0"/>
+              <a:t> </a:t>
+            </a:r>
+            <a:r>
+              <a:rPr lang="en-US" dirty="0" err="1"/>
+              <a:t>meestal</a:t>
+            </a:r>
+            <a:r>
+              <a:rPr lang="en-US" dirty="0"/>
+              <a:t> de EU863-870 / EU868 band. </a:t>
+            </a:r>
+            <a:r>
+              <a:rPr lang="en-US" dirty="0" err="1"/>
+              <a:t>Deze</a:t>
+            </a:r>
+            <a:r>
+              <a:rPr lang="en-US" dirty="0"/>
+              <a:t> band </a:t>
+            </a:r>
+            <a:r>
+              <a:rPr lang="en-US" dirty="0" err="1"/>
+              <a:t>valt</a:t>
+            </a:r>
+            <a:r>
+              <a:rPr lang="en-US" dirty="0"/>
+              <a:t> </a:t>
+            </a:r>
+            <a:r>
+              <a:rPr lang="en-US" dirty="0" err="1"/>
+              <a:t>onder</a:t>
+            </a:r>
+            <a:r>
+              <a:rPr lang="en-US" dirty="0"/>
+              <a:t> ETSI-regels </a:t>
+            </a:r>
+            <a:r>
+              <a:rPr lang="en-US" dirty="0" err="1"/>
+              <a:t>en</a:t>
+            </a:r>
+            <a:r>
+              <a:rPr lang="en-US" dirty="0"/>
+              <a:t> </a:t>
+            </a:r>
+            <a:r>
+              <a:rPr lang="en-US" dirty="0" err="1"/>
+              <a:t>kent</a:t>
+            </a:r>
+            <a:r>
+              <a:rPr lang="en-US" dirty="0"/>
+              <a:t> </a:t>
+            </a:r>
+            <a:r>
+              <a:rPr lang="en-US" b="1" dirty="0"/>
+              <a:t>duty-cycle-</a:t>
+            </a:r>
+            <a:r>
+              <a:rPr lang="en-US" b="1" dirty="0" err="1"/>
+              <a:t>beperkingen</a:t>
+            </a:r>
+            <a:r>
+              <a:rPr lang="en-US" dirty="0"/>
+              <a:t>: </a:t>
+            </a:r>
+            <a:r>
+              <a:rPr lang="en-US" dirty="0" err="1"/>
+              <a:t>een</a:t>
+            </a:r>
+            <a:r>
+              <a:rPr lang="en-US" dirty="0"/>
+              <a:t> </a:t>
+            </a:r>
+            <a:r>
+              <a:rPr lang="en-US" dirty="0" err="1"/>
+              <a:t>apparaat</a:t>
+            </a:r>
+            <a:r>
+              <a:rPr lang="en-US" dirty="0"/>
+              <a:t> mag maar </a:t>
+            </a:r>
+            <a:r>
+              <a:rPr lang="en-US" dirty="0" err="1"/>
+              <a:t>een</a:t>
+            </a:r>
+            <a:r>
+              <a:rPr lang="en-US" dirty="0"/>
+              <a:t> </a:t>
+            </a:r>
+            <a:r>
+              <a:rPr lang="en-US" dirty="0" err="1"/>
+              <a:t>bepaald</a:t>
+            </a:r>
+            <a:r>
+              <a:rPr lang="en-US" dirty="0"/>
+              <a:t> percentage van de </a:t>
+            </a:r>
+            <a:r>
+              <a:rPr lang="en-US" dirty="0" err="1"/>
+              <a:t>tijd</a:t>
+            </a:r>
+            <a:r>
+              <a:rPr lang="en-US" dirty="0"/>
+              <a:t> </a:t>
+            </a:r>
+            <a:r>
+              <a:rPr lang="en-US" dirty="0" err="1"/>
+              <a:t>zenden</a:t>
+            </a:r>
+            <a:r>
+              <a:rPr lang="en-US" dirty="0"/>
+              <a:t>, </a:t>
+            </a:r>
+            <a:r>
+              <a:rPr lang="en-US" dirty="0" err="1"/>
+              <a:t>zodat</a:t>
+            </a:r>
+            <a:r>
+              <a:rPr lang="en-US" dirty="0"/>
+              <a:t> de band </a:t>
+            </a:r>
+            <a:r>
+              <a:rPr lang="en-US" dirty="0" err="1"/>
+              <a:t>gedeeld</a:t>
+            </a:r>
+            <a:r>
+              <a:rPr lang="en-US" dirty="0"/>
+              <a:t> </a:t>
+            </a:r>
+            <a:r>
+              <a:rPr lang="en-US" dirty="0" err="1"/>
+              <a:t>kan</a:t>
+            </a:r>
+            <a:r>
+              <a:rPr lang="en-US" dirty="0"/>
+              <a:t> </a:t>
+            </a:r>
+            <a:r>
+              <a:rPr lang="en-US" dirty="0" err="1"/>
+              <a:t>worden</a:t>
+            </a:r>
+            <a:r>
+              <a:rPr lang="en-US" dirty="0"/>
+              <a:t> met </a:t>
+            </a:r>
+            <a:r>
+              <a:rPr lang="en-US" dirty="0" err="1"/>
+              <a:t>andere</a:t>
+            </a:r>
+            <a:r>
+              <a:rPr lang="en-US" dirty="0"/>
+              <a:t> </a:t>
+            </a:r>
+            <a:r>
+              <a:rPr lang="en-US" dirty="0" err="1"/>
+              <a:t>gebruikers</a:t>
+            </a:r>
+            <a:r>
+              <a:rPr lang="en-US" dirty="0"/>
+              <a:t>. Voor </a:t>
+            </a:r>
+            <a:r>
+              <a:rPr lang="en-US" dirty="0" err="1"/>
+              <a:t>LoRaWAN</a:t>
+            </a:r>
+            <a:r>
+              <a:rPr lang="en-US" dirty="0"/>
+              <a:t> </a:t>
+            </a:r>
+            <a:r>
+              <a:rPr lang="en-US" dirty="0" err="1"/>
+              <a:t>betekent</a:t>
+            </a:r>
+            <a:r>
+              <a:rPr lang="en-US" dirty="0"/>
+              <a:t> </a:t>
+            </a:r>
+            <a:r>
+              <a:rPr lang="en-US" dirty="0" err="1"/>
+              <a:t>dit</a:t>
+            </a:r>
+            <a:r>
+              <a:rPr lang="en-US" dirty="0"/>
+              <a:t> </a:t>
+            </a:r>
+            <a:r>
+              <a:rPr lang="en-US" dirty="0" err="1"/>
+              <a:t>dat</a:t>
+            </a:r>
+            <a:r>
+              <a:rPr lang="en-US" dirty="0"/>
+              <a:t> je </a:t>
+            </a:r>
+            <a:r>
+              <a:rPr lang="en-US" dirty="0" err="1"/>
+              <a:t>geen</a:t>
+            </a:r>
+            <a:r>
+              <a:rPr lang="en-US" dirty="0"/>
+              <a:t> </a:t>
+            </a:r>
+            <a:r>
+              <a:rPr lang="en-US" dirty="0" err="1"/>
+              <a:t>continu</a:t>
+            </a:r>
+            <a:r>
+              <a:rPr lang="en-US" dirty="0"/>
+              <a:t> </a:t>
+            </a:r>
+            <a:r>
+              <a:rPr lang="en-US" dirty="0" err="1"/>
+              <a:t>dataverkeer</a:t>
+            </a:r>
+            <a:r>
+              <a:rPr lang="en-US" dirty="0"/>
+              <a:t> </a:t>
+            </a:r>
+            <a:r>
+              <a:rPr lang="en-US" dirty="0" err="1"/>
+              <a:t>kunt</a:t>
+            </a:r>
+            <a:r>
+              <a:rPr lang="en-US" dirty="0"/>
+              <a:t> </a:t>
+            </a:r>
+            <a:r>
+              <a:rPr lang="en-US" dirty="0" err="1"/>
+              <a:t>doen</a:t>
+            </a:r>
+            <a:r>
+              <a:rPr lang="en-US" dirty="0"/>
+              <a:t> </a:t>
+            </a:r>
+            <a:r>
+              <a:rPr lang="en-US" dirty="0" err="1"/>
+              <a:t>zoals</a:t>
+            </a:r>
+            <a:r>
+              <a:rPr lang="en-US" dirty="0"/>
+              <a:t> </a:t>
+            </a:r>
+            <a:r>
+              <a:rPr lang="en-US" dirty="0" err="1"/>
+              <a:t>bij</a:t>
+            </a:r>
+            <a:r>
+              <a:rPr lang="en-US" dirty="0"/>
+              <a:t> </a:t>
+            </a:r>
+            <a:r>
+              <a:rPr lang="en-US" dirty="0" err="1"/>
+              <a:t>wifi</a:t>
+            </a:r>
+            <a:r>
+              <a:rPr lang="en-US" dirty="0"/>
+              <a:t>.</a:t>
+            </a:r>
+          </a:p>
+        </p:txBody>
+      </p:sp>
+    </p:spTree>
+    <p:extLst>
+      <p:ext uri="{BB962C8B-B14F-4D97-AF65-F5344CB8AC3E}">
+        <p14:creationId xmlns:p14="http://schemas.microsoft.com/office/powerpoint/2010/main" val="3212452010"/>
+      </p:ext>
+    </p:extLst>
+  </p:cSld>
+  <p:clrMapOvr>
+    <a:masterClrMapping/>
+  </p:clrMapOvr>
+</p:sld>
+</file>
+
+<file path=ppt/slides/slide8.xml><?xml version="1.0" encoding="utf-8"?>
+<p:sld xmlns:a="http://schemas.openxmlformats.org/drawingml/2006/main" xmlns:r="http://schemas.openxmlformats.org/officeDocument/2006/relationships" xmlns:p="http://schemas.openxmlformats.org/presentationml/2006/main">
+  <p:cSld>
+    <p:spTree>
+      <p:nvGrpSpPr>
+        <p:cNvPr id="1" name="">
+          <a:extLst>
+            <a:ext uri="{FF2B5EF4-FFF2-40B4-BE49-F238E27FC236}">
               <a16:creationId xmlns:a16="http://schemas.microsoft.com/office/drawing/2014/main" id="{E34DAEAF-8550-F140-3391-20314C240462}"/>
             </a:ext>
           </a:extLst>
@@ -4773,7 +8050,7 @@
 </p:sld>
 </file>
 
-<file path=ppt/slides/slide6.xml><?xml version="1.0" encoding="utf-8"?>
+<file path=ppt/slides/slide9.xml><?xml version="1.0" encoding="utf-8"?>
 <p:sld xmlns:a="http://schemas.openxmlformats.org/drawingml/2006/main" xmlns:r="http://schemas.openxmlformats.org/officeDocument/2006/relationships" xmlns:p="http://schemas.openxmlformats.org/presentationml/2006/main">
   <p:cSld>
     <p:spTree>
@@ -5339,1685 +8616,6 @@
       </p:par>
     </p:tnLst>
   </p:timing>
-</p:sld>
-</file>
-
-<file path=ppt/slides/slide7.xml><?xml version="1.0" encoding="utf-8"?>
-<p:sld xmlns:a="http://schemas.openxmlformats.org/drawingml/2006/main" xmlns:r="http://schemas.openxmlformats.org/officeDocument/2006/relationships" xmlns:p="http://schemas.openxmlformats.org/presentationml/2006/main">
-  <p:cSld>
-    <p:spTree>
-      <p:nvGrpSpPr>
-        <p:cNvPr id="1" name="">
-          <a:extLst>
-            <a:ext uri="{FF2B5EF4-FFF2-40B4-BE49-F238E27FC236}">
-              <a16:creationId xmlns:a16="http://schemas.microsoft.com/office/drawing/2014/main" id="{10B34F92-CC12-7C6D-A70B-3DDE78DD27CA}"/>
-            </a:ext>
-          </a:extLst>
-        </p:cNvPr>
-        <p:cNvGrpSpPr/>
-        <p:nvPr/>
-      </p:nvGrpSpPr>
-      <p:grpSpPr>
-        <a:xfrm>
-          <a:off x="0" y="0"/>
-          <a:ext cx="0" cy="0"/>
-          <a:chOff x="0" y="0"/>
-          <a:chExt cx="0" cy="0"/>
-        </a:xfrm>
-      </p:grpSpPr>
-      <p:sp>
-        <p:nvSpPr>
-          <p:cNvPr id="2" name="Title 1">
-            <a:extLst>
-              <a:ext uri="{FF2B5EF4-FFF2-40B4-BE49-F238E27FC236}">
-                <a16:creationId xmlns:a16="http://schemas.microsoft.com/office/drawing/2014/main" id="{9B4343F3-ACB2-4864-38BD-6802694FFC9B}"/>
-              </a:ext>
-            </a:extLst>
-          </p:cNvPr>
-          <p:cNvSpPr>
-            <a:spLocks noGrp="1"/>
-          </p:cNvSpPr>
-          <p:nvPr>
-            <p:ph type="title"/>
-          </p:nvPr>
-        </p:nvSpPr>
-        <p:spPr/>
-        <p:txBody>
-          <a:bodyPr/>
-          <a:lstStyle/>
-          <a:p>
-            <a:r>
-              <a:rPr lang="en-US" dirty="0"/>
-              <a:t>Keys </a:t>
-            </a:r>
-            <a:r>
-              <a:rPr lang="en-US" dirty="0" err="1"/>
-              <a:t>toelichting</a:t>
-            </a:r>
-            <a:endParaRPr lang="en-NL" dirty="0"/>
-          </a:p>
-        </p:txBody>
-      </p:sp>
-      <p:sp>
-        <p:nvSpPr>
-          <p:cNvPr id="3" name="Content Placeholder 2">
-            <a:extLst>
-              <a:ext uri="{FF2B5EF4-FFF2-40B4-BE49-F238E27FC236}">
-                <a16:creationId xmlns:a16="http://schemas.microsoft.com/office/drawing/2014/main" id="{56761677-057A-B305-D372-73561DC178B2}"/>
-              </a:ext>
-            </a:extLst>
-          </p:cNvPr>
-          <p:cNvSpPr>
-            <a:spLocks noGrp="1"/>
-          </p:cNvSpPr>
-          <p:nvPr>
-            <p:ph idx="1"/>
-          </p:nvPr>
-        </p:nvSpPr>
-        <p:spPr/>
-        <p:txBody>
-          <a:bodyPr>
-            <a:normAutofit fontScale="77500" lnSpcReduction="20000"/>
-          </a:bodyPr>
-          <a:lstStyle/>
-          <a:p>
-            <a:pPr marL="0" indent="0">
-              <a:buNone/>
-            </a:pPr>
-            <a:r>
-              <a:rPr lang="nn-NO" sz="2800" dirty="0" err="1">
-                <a:highlight>
-                  <a:srgbClr val="FFFFFF"/>
-                </a:highlight>
-              </a:rPr>
-              <a:t>Bij</a:t>
-            </a:r>
-            <a:r>
-              <a:rPr lang="nn-NO" sz="2800" dirty="0">
-                <a:highlight>
-                  <a:srgbClr val="FFFFFF"/>
-                </a:highlight>
-              </a:rPr>
-              <a:t> OTAA kom </a:t>
-            </a:r>
-            <a:r>
-              <a:rPr lang="nn-NO" sz="2800" dirty="0" err="1">
-                <a:highlight>
-                  <a:srgbClr val="FFFFFF"/>
-                </a:highlight>
-              </a:rPr>
-              <a:t>je</a:t>
-            </a:r>
-            <a:r>
-              <a:rPr lang="nn-NO" sz="2800" dirty="0">
-                <a:highlight>
-                  <a:srgbClr val="FFFFFF"/>
-                </a:highlight>
-              </a:rPr>
-              <a:t> </a:t>
-            </a:r>
-            <a:r>
-              <a:rPr lang="nn-NO" sz="2800" dirty="0" err="1">
-                <a:highlight>
-                  <a:srgbClr val="FFFFFF"/>
-                </a:highlight>
-              </a:rPr>
-              <a:t>meestal</a:t>
-            </a:r>
-            <a:r>
-              <a:rPr lang="nn-NO" sz="2800" dirty="0">
-                <a:highlight>
-                  <a:srgbClr val="FFFFFF"/>
-                </a:highlight>
-              </a:rPr>
-              <a:t> </a:t>
-            </a:r>
-            <a:r>
-              <a:rPr lang="nn-NO" sz="2800" dirty="0" err="1">
-                <a:highlight>
-                  <a:srgbClr val="FFFFFF"/>
-                </a:highlight>
-              </a:rPr>
-              <a:t>deze</a:t>
-            </a:r>
-            <a:r>
-              <a:rPr lang="nn-NO" sz="2800" dirty="0">
-                <a:highlight>
-                  <a:srgbClr val="FFFFFF"/>
-                </a:highlight>
-              </a:rPr>
-              <a:t> velden </a:t>
-            </a:r>
-            <a:r>
-              <a:rPr lang="nn-NO" sz="2800" dirty="0" err="1">
-                <a:highlight>
-                  <a:srgbClr val="FFFFFF"/>
-                </a:highlight>
-              </a:rPr>
-              <a:t>tegen</a:t>
-            </a:r>
-            <a:r>
-              <a:rPr lang="nn-NO" sz="2800" dirty="0">
-                <a:highlight>
-                  <a:srgbClr val="FFFFFF"/>
-                </a:highlight>
-              </a:rPr>
-              <a:t>:</a:t>
-            </a:r>
-          </a:p>
-          <a:p>
-            <a:pPr marL="0" indent="0">
-              <a:buNone/>
-            </a:pPr>
-            <a:r>
-              <a:rPr lang="nn-NO" sz="2800" b="1" dirty="0" err="1">
-                <a:highlight>
-                  <a:srgbClr val="FFFFFF"/>
-                </a:highlight>
-              </a:rPr>
-              <a:t>DevEUI</a:t>
-            </a:r>
-            <a:r>
-              <a:rPr lang="nn-NO" b="1" dirty="0">
-                <a:highlight>
-                  <a:srgbClr val="FFFFFF"/>
-                </a:highlight>
-              </a:rPr>
-              <a:t>: </a:t>
-            </a:r>
-            <a:r>
-              <a:rPr lang="nn-NO" sz="2800" dirty="0" err="1">
-                <a:highlight>
-                  <a:srgbClr val="FFFFFF"/>
-                </a:highlight>
-              </a:rPr>
-              <a:t>Unieke</a:t>
-            </a:r>
-            <a:r>
-              <a:rPr lang="nn-NO" sz="2800" dirty="0">
-                <a:highlight>
-                  <a:srgbClr val="FFFFFF"/>
-                </a:highlight>
-              </a:rPr>
-              <a:t> </a:t>
-            </a:r>
-            <a:r>
-              <a:rPr lang="nn-NO" sz="2800" dirty="0" err="1">
-                <a:highlight>
-                  <a:srgbClr val="FFFFFF"/>
-                </a:highlight>
-              </a:rPr>
-              <a:t>identiteit</a:t>
-            </a:r>
-            <a:r>
-              <a:rPr lang="nn-NO" sz="2800" dirty="0">
-                <a:highlight>
-                  <a:srgbClr val="FFFFFF"/>
-                </a:highlight>
-              </a:rPr>
-              <a:t> van het </a:t>
-            </a:r>
-            <a:r>
-              <a:rPr lang="nn-NO" sz="2800" dirty="0" err="1">
-                <a:highlight>
-                  <a:srgbClr val="FFFFFF"/>
-                </a:highlight>
-              </a:rPr>
-              <a:t>device</a:t>
-            </a:r>
-            <a:r>
-              <a:rPr lang="nn-NO" sz="2800" dirty="0">
-                <a:highlight>
-                  <a:srgbClr val="FFFFFF"/>
-                </a:highlight>
-              </a:rPr>
-              <a:t>. </a:t>
-            </a:r>
-            <a:r>
-              <a:rPr lang="nn-NO" sz="2800" dirty="0" err="1">
-                <a:highlight>
-                  <a:srgbClr val="FFFFFF"/>
-                </a:highlight>
-              </a:rPr>
-              <a:t>Vergelijkbaar</a:t>
-            </a:r>
-            <a:r>
-              <a:rPr lang="nn-NO" sz="2800" dirty="0">
-                <a:highlight>
-                  <a:srgbClr val="FFFFFF"/>
-                </a:highlight>
-              </a:rPr>
-              <a:t> </a:t>
-            </a:r>
-            <a:r>
-              <a:rPr lang="nn-NO" sz="2800" dirty="0" err="1">
-                <a:highlight>
-                  <a:srgbClr val="FFFFFF"/>
-                </a:highlight>
-              </a:rPr>
-              <a:t>met</a:t>
-            </a:r>
-            <a:r>
-              <a:rPr lang="nn-NO" sz="2800" dirty="0">
-                <a:highlight>
-                  <a:srgbClr val="FFFFFF"/>
-                </a:highlight>
-              </a:rPr>
-              <a:t> </a:t>
-            </a:r>
-            <a:r>
-              <a:rPr lang="nn-NO" sz="2800" dirty="0" err="1">
-                <a:highlight>
-                  <a:srgbClr val="FFFFFF"/>
-                </a:highlight>
-              </a:rPr>
-              <a:t>een</a:t>
-            </a:r>
-            <a:r>
-              <a:rPr lang="nn-NO" sz="2800" dirty="0">
-                <a:highlight>
-                  <a:srgbClr val="FFFFFF"/>
-                </a:highlight>
-              </a:rPr>
-              <a:t> serienummer </a:t>
-            </a:r>
-            <a:r>
-              <a:rPr lang="nn-NO" sz="2800" dirty="0" err="1">
-                <a:highlight>
-                  <a:srgbClr val="FFFFFF"/>
-                </a:highlight>
-              </a:rPr>
-              <a:t>binnen</a:t>
-            </a:r>
-            <a:r>
-              <a:rPr lang="nn-NO" sz="2800" dirty="0">
-                <a:highlight>
-                  <a:srgbClr val="FFFFFF"/>
-                </a:highlight>
-              </a:rPr>
-              <a:t> het </a:t>
-            </a:r>
-            <a:r>
-              <a:rPr lang="nn-NO" sz="2800" dirty="0" err="1">
-                <a:highlight>
-                  <a:srgbClr val="FFFFFF"/>
-                </a:highlight>
-              </a:rPr>
-              <a:t>LoRaWAN-systeem</a:t>
-            </a:r>
-            <a:r>
-              <a:rPr lang="nn-NO" sz="2800" dirty="0">
-                <a:highlight>
-                  <a:srgbClr val="FFFFFF"/>
-                </a:highlight>
-              </a:rPr>
-              <a:t>.</a:t>
-            </a:r>
-          </a:p>
-          <a:p>
-            <a:pPr marL="0" indent="0">
-              <a:buNone/>
-            </a:pPr>
-            <a:r>
-              <a:rPr lang="nn-NO" sz="2800" b="1" dirty="0" err="1">
-                <a:highlight>
-                  <a:srgbClr val="FFFFFF"/>
-                </a:highlight>
-              </a:rPr>
-              <a:t>JoinEUI</a:t>
-            </a:r>
-            <a:r>
-              <a:rPr lang="nn-NO" sz="2800" b="1" dirty="0">
-                <a:highlight>
-                  <a:srgbClr val="FFFFFF"/>
-                </a:highlight>
-              </a:rPr>
-              <a:t>: </a:t>
-            </a:r>
-            <a:r>
-              <a:rPr lang="nn-NO" sz="2800" dirty="0" err="1">
-                <a:highlight>
-                  <a:srgbClr val="FFFFFF"/>
-                </a:highlight>
-              </a:rPr>
-              <a:t>Identificeert</a:t>
-            </a:r>
-            <a:r>
-              <a:rPr lang="nn-NO" sz="2800" dirty="0">
-                <a:highlight>
-                  <a:srgbClr val="FFFFFF"/>
-                </a:highlight>
-              </a:rPr>
-              <a:t> </a:t>
-            </a:r>
-            <a:r>
-              <a:rPr lang="nn-NO" sz="2800" dirty="0" err="1">
-                <a:highlight>
-                  <a:srgbClr val="FFFFFF"/>
-                </a:highlight>
-              </a:rPr>
-              <a:t>bij</a:t>
-            </a:r>
-            <a:r>
-              <a:rPr lang="nn-NO" sz="2800" dirty="0">
-                <a:highlight>
-                  <a:srgbClr val="FFFFFF"/>
-                </a:highlight>
-              </a:rPr>
-              <a:t> </a:t>
-            </a:r>
-            <a:r>
-              <a:rPr lang="nn-NO" sz="2800" dirty="0" err="1">
-                <a:highlight>
-                  <a:srgbClr val="FFFFFF"/>
-                </a:highlight>
-              </a:rPr>
-              <a:t>welke</a:t>
-            </a:r>
-            <a:r>
-              <a:rPr lang="nn-NO" sz="2800" dirty="0">
-                <a:highlight>
-                  <a:srgbClr val="FFFFFF"/>
-                </a:highlight>
-              </a:rPr>
-              <a:t> join-</a:t>
-            </a:r>
-            <a:r>
-              <a:rPr lang="nn-NO" sz="2800" dirty="0" err="1">
-                <a:highlight>
-                  <a:srgbClr val="FFFFFF"/>
-                </a:highlight>
-              </a:rPr>
-              <a:t>context</a:t>
-            </a:r>
-            <a:r>
-              <a:rPr lang="nn-NO" sz="2800" dirty="0">
-                <a:highlight>
-                  <a:srgbClr val="FFFFFF"/>
-                </a:highlight>
-              </a:rPr>
-              <a:t> </a:t>
-            </a:r>
-            <a:r>
-              <a:rPr lang="nn-NO" sz="2800" dirty="0" err="1">
-                <a:highlight>
-                  <a:srgbClr val="FFFFFF"/>
-                </a:highlight>
-              </a:rPr>
-              <a:t>of</a:t>
-            </a:r>
-            <a:r>
-              <a:rPr lang="nn-NO" sz="2800" dirty="0">
-                <a:highlight>
-                  <a:srgbClr val="FFFFFF"/>
-                </a:highlight>
-              </a:rPr>
-              <a:t> </a:t>
-            </a:r>
-            <a:r>
-              <a:rPr lang="nn-NO" sz="2800" dirty="0" err="1">
-                <a:highlight>
-                  <a:srgbClr val="FFFFFF"/>
-                </a:highlight>
-              </a:rPr>
-              <a:t>leverancier</a:t>
-            </a:r>
-            <a:r>
-              <a:rPr lang="nn-NO" sz="2800" dirty="0">
-                <a:highlight>
-                  <a:srgbClr val="FFFFFF"/>
-                </a:highlight>
-              </a:rPr>
-              <a:t> het </a:t>
-            </a:r>
-            <a:r>
-              <a:rPr lang="nn-NO" sz="2800" dirty="0" err="1">
-                <a:highlight>
-                  <a:srgbClr val="FFFFFF"/>
-                </a:highlight>
-              </a:rPr>
-              <a:t>device</a:t>
-            </a:r>
-            <a:r>
-              <a:rPr lang="nn-NO" sz="2800" dirty="0">
-                <a:highlight>
-                  <a:srgbClr val="FFFFFF"/>
-                </a:highlight>
-              </a:rPr>
-              <a:t> </a:t>
-            </a:r>
-            <a:r>
-              <a:rPr lang="nn-NO" sz="2800" dirty="0" err="1">
-                <a:highlight>
-                  <a:srgbClr val="FFFFFF"/>
-                </a:highlight>
-              </a:rPr>
-              <a:t>hoort</a:t>
-            </a:r>
-            <a:r>
-              <a:rPr lang="nn-NO" sz="2800" dirty="0">
-                <a:highlight>
-                  <a:srgbClr val="FFFFFF"/>
-                </a:highlight>
-              </a:rPr>
-              <a:t>. </a:t>
-            </a:r>
-            <a:r>
-              <a:rPr lang="nn-NO" sz="2800" dirty="0" err="1">
-                <a:highlight>
-                  <a:srgbClr val="FFFFFF"/>
-                </a:highlight>
-              </a:rPr>
-              <a:t>Bij</a:t>
-            </a:r>
-            <a:r>
-              <a:rPr lang="nn-NO" sz="2800" dirty="0">
-                <a:highlight>
-                  <a:srgbClr val="FFFFFF"/>
-                </a:highlight>
-              </a:rPr>
-              <a:t> </a:t>
-            </a:r>
-            <a:r>
-              <a:rPr lang="nn-NO" sz="2800" dirty="0" err="1">
-                <a:highlight>
-                  <a:srgbClr val="FFFFFF"/>
-                </a:highlight>
-              </a:rPr>
-              <a:t>handmatig</a:t>
-            </a:r>
-            <a:r>
-              <a:rPr lang="nn-NO" sz="2800" dirty="0">
-                <a:highlight>
-                  <a:srgbClr val="FFFFFF"/>
-                </a:highlight>
-              </a:rPr>
-              <a:t> </a:t>
-            </a:r>
-            <a:r>
-              <a:rPr lang="nn-NO" sz="2800" dirty="0" err="1">
-                <a:highlight>
-                  <a:srgbClr val="FFFFFF"/>
-                </a:highlight>
-              </a:rPr>
-              <a:t>geregistreerde</a:t>
-            </a:r>
-            <a:r>
-              <a:rPr lang="nn-NO" sz="2800" dirty="0">
-                <a:highlight>
-                  <a:srgbClr val="FFFFFF"/>
-                </a:highlight>
-              </a:rPr>
-              <a:t> </a:t>
-            </a:r>
-            <a:r>
-              <a:rPr lang="nn-NO" sz="2800" dirty="0" err="1">
-                <a:highlight>
-                  <a:srgbClr val="FFFFFF"/>
-                </a:highlight>
-              </a:rPr>
-              <a:t>custom</a:t>
-            </a:r>
-            <a:r>
-              <a:rPr lang="nn-NO" sz="2800" dirty="0">
-                <a:highlight>
-                  <a:srgbClr val="FFFFFF"/>
-                </a:highlight>
-              </a:rPr>
-              <a:t> </a:t>
-            </a:r>
-            <a:r>
-              <a:rPr lang="nn-NO" sz="2800" dirty="0" err="1">
-                <a:highlight>
-                  <a:srgbClr val="FFFFFF"/>
-                </a:highlight>
-              </a:rPr>
-              <a:t>devices</a:t>
-            </a:r>
-            <a:r>
-              <a:rPr lang="nn-NO" sz="2800" dirty="0">
-                <a:highlight>
-                  <a:srgbClr val="FFFFFF"/>
-                </a:highlight>
-              </a:rPr>
-              <a:t> </a:t>
-            </a:r>
-            <a:r>
-              <a:rPr lang="nn-NO" sz="2800" dirty="0" err="1">
-                <a:highlight>
-                  <a:srgbClr val="FFFFFF"/>
-                </a:highlight>
-              </a:rPr>
-              <a:t>wordt</a:t>
-            </a:r>
-            <a:r>
-              <a:rPr lang="nn-NO" sz="2800" dirty="0">
-                <a:highlight>
-                  <a:srgbClr val="FFFFFF"/>
-                </a:highlight>
-              </a:rPr>
-              <a:t> </a:t>
-            </a:r>
-            <a:r>
-              <a:rPr lang="nn-NO" sz="2800" dirty="0" err="1">
-                <a:highlight>
-                  <a:srgbClr val="FFFFFF"/>
-                </a:highlight>
-              </a:rPr>
-              <a:t>vaak</a:t>
-            </a:r>
-            <a:r>
-              <a:rPr lang="nn-NO" sz="2800" dirty="0">
-                <a:highlight>
-                  <a:srgbClr val="FFFFFF"/>
-                </a:highlight>
-              </a:rPr>
-              <a:t> </a:t>
-            </a:r>
-            <a:r>
-              <a:rPr lang="nn-NO" sz="2800" dirty="0" err="1">
-                <a:highlight>
-                  <a:srgbClr val="FFFFFF"/>
-                </a:highlight>
-              </a:rPr>
-              <a:t>een</a:t>
-            </a:r>
-            <a:r>
-              <a:rPr lang="nn-NO" sz="2800" dirty="0">
-                <a:highlight>
-                  <a:srgbClr val="FFFFFF"/>
-                </a:highlight>
-              </a:rPr>
-              <a:t> </a:t>
-            </a:r>
-            <a:r>
-              <a:rPr lang="nn-NO" sz="2800" dirty="0" err="1">
-                <a:highlight>
-                  <a:srgbClr val="FFFFFF"/>
-                </a:highlight>
-              </a:rPr>
-              <a:t>vaste</a:t>
-            </a:r>
-            <a:r>
-              <a:rPr lang="nn-NO" sz="2800" dirty="0">
-                <a:highlight>
-                  <a:srgbClr val="FFFFFF"/>
-                </a:highlight>
-              </a:rPr>
-              <a:t> </a:t>
-            </a:r>
-            <a:r>
-              <a:rPr lang="nn-NO" sz="2800" dirty="0" err="1">
-                <a:highlight>
-                  <a:srgbClr val="FFFFFF"/>
-                </a:highlight>
-              </a:rPr>
-              <a:t>waarde</a:t>
-            </a:r>
-            <a:r>
-              <a:rPr lang="nn-NO" sz="2800" dirty="0">
-                <a:highlight>
-                  <a:srgbClr val="FFFFFF"/>
-                </a:highlight>
-              </a:rPr>
-              <a:t> </a:t>
-            </a:r>
-            <a:r>
-              <a:rPr lang="nn-NO" sz="2800" dirty="0" err="1">
-                <a:highlight>
-                  <a:srgbClr val="FFFFFF"/>
-                </a:highlight>
-              </a:rPr>
-              <a:t>gebruikt</a:t>
-            </a:r>
-            <a:r>
-              <a:rPr lang="nn-NO" sz="2800" dirty="0">
-                <a:highlight>
-                  <a:srgbClr val="FFFFFF"/>
-                </a:highlight>
-              </a:rPr>
-              <a:t>, </a:t>
-            </a:r>
-            <a:r>
-              <a:rPr lang="nn-NO" sz="2800" dirty="0" err="1">
-                <a:highlight>
-                  <a:srgbClr val="FFFFFF"/>
-                </a:highlight>
-              </a:rPr>
-              <a:t>bijvoorbeeld</a:t>
-            </a:r>
-            <a:r>
-              <a:rPr lang="nn-NO" sz="2800" dirty="0">
-                <a:highlight>
-                  <a:srgbClr val="FFFFFF"/>
-                </a:highlight>
-              </a:rPr>
-              <a:t> </a:t>
-            </a:r>
-            <a:r>
-              <a:rPr lang="nn-NO" sz="2800" dirty="0" err="1">
-                <a:highlight>
-                  <a:srgbClr val="FFFFFF"/>
-                </a:highlight>
-              </a:rPr>
-              <a:t>allemaal</a:t>
-            </a:r>
-            <a:r>
-              <a:rPr lang="nn-NO" sz="2800" dirty="0">
-                <a:highlight>
-                  <a:srgbClr val="FFFFFF"/>
-                </a:highlight>
-              </a:rPr>
-              <a:t> nullen, </a:t>
-            </a:r>
-            <a:r>
-              <a:rPr lang="nn-NO" sz="2800" dirty="0" err="1">
-                <a:highlight>
-                  <a:srgbClr val="FFFFFF"/>
-                </a:highlight>
-              </a:rPr>
-              <a:t>als</a:t>
-            </a:r>
-            <a:r>
-              <a:rPr lang="nn-NO" sz="2800" dirty="0">
-                <a:highlight>
-                  <a:srgbClr val="FFFFFF"/>
-                </a:highlight>
-              </a:rPr>
-              <a:t> </a:t>
-            </a:r>
-            <a:r>
-              <a:rPr lang="nn-NO" sz="2800" dirty="0" err="1">
-                <a:highlight>
-                  <a:srgbClr val="FFFFFF"/>
-                </a:highlight>
-              </a:rPr>
-              <a:t>dat</a:t>
-            </a:r>
-            <a:r>
-              <a:rPr lang="nn-NO" sz="2800" dirty="0">
-                <a:highlight>
-                  <a:srgbClr val="FFFFFF"/>
-                </a:highlight>
-              </a:rPr>
-              <a:t> </a:t>
-            </a:r>
-            <a:r>
-              <a:rPr lang="nn-NO" sz="2800" dirty="0" err="1">
-                <a:highlight>
-                  <a:srgbClr val="FFFFFF"/>
-                </a:highlight>
-              </a:rPr>
-              <a:t>zo</a:t>
-            </a:r>
-            <a:r>
-              <a:rPr lang="nn-NO" sz="2800" dirty="0">
-                <a:highlight>
-                  <a:srgbClr val="FFFFFF"/>
-                </a:highlight>
-              </a:rPr>
-              <a:t> in de </a:t>
-            </a:r>
-            <a:r>
-              <a:rPr lang="nn-NO" sz="2800" dirty="0" err="1">
-                <a:highlight>
-                  <a:srgbClr val="FFFFFF"/>
-                </a:highlight>
-              </a:rPr>
-              <a:t>provisioning</a:t>
-            </a:r>
-            <a:r>
-              <a:rPr lang="nn-NO" sz="2800" dirty="0">
-                <a:highlight>
-                  <a:srgbClr val="FFFFFF"/>
-                </a:highlight>
-              </a:rPr>
-              <a:t> is </a:t>
-            </a:r>
-            <a:r>
-              <a:rPr lang="nn-NO" sz="2800" dirty="0" err="1">
-                <a:highlight>
-                  <a:srgbClr val="FFFFFF"/>
-                </a:highlight>
-              </a:rPr>
-              <a:t>gekozen</a:t>
-            </a:r>
-            <a:r>
-              <a:rPr lang="nn-NO" sz="2800" dirty="0">
-                <a:highlight>
-                  <a:srgbClr val="FFFFFF"/>
-                </a:highlight>
-              </a:rPr>
-              <a:t>.</a:t>
-            </a:r>
-          </a:p>
-          <a:p>
-            <a:pPr marL="0" indent="0">
-              <a:buNone/>
-            </a:pPr>
-            <a:r>
-              <a:rPr lang="nn-NO" sz="2800" b="1" dirty="0" err="1">
-                <a:highlight>
-                  <a:srgbClr val="FFFFFF"/>
-                </a:highlight>
-              </a:rPr>
-              <a:t>AppKey</a:t>
-            </a:r>
-            <a:r>
-              <a:rPr lang="nn-NO" b="1" dirty="0">
-                <a:highlight>
-                  <a:srgbClr val="FFFFFF"/>
-                </a:highlight>
-              </a:rPr>
-              <a:t>: </a:t>
-            </a:r>
-            <a:r>
-              <a:rPr lang="nn-NO" sz="2800" dirty="0" err="1">
-                <a:highlight>
-                  <a:srgbClr val="FFFFFF"/>
-                </a:highlight>
-              </a:rPr>
-              <a:t>Een</a:t>
-            </a:r>
-            <a:r>
-              <a:rPr lang="nn-NO" sz="2800" dirty="0">
-                <a:highlight>
-                  <a:srgbClr val="FFFFFF"/>
-                </a:highlight>
-              </a:rPr>
-              <a:t> </a:t>
-            </a:r>
-            <a:r>
-              <a:rPr lang="nn-NO" sz="2800" dirty="0" err="1">
-                <a:highlight>
-                  <a:srgbClr val="FFFFFF"/>
-                </a:highlight>
-              </a:rPr>
-              <a:t>root</a:t>
-            </a:r>
-            <a:r>
-              <a:rPr lang="nn-NO" sz="2800" dirty="0">
-                <a:highlight>
-                  <a:srgbClr val="FFFFFF"/>
-                </a:highlight>
-              </a:rPr>
-              <a:t> </a:t>
-            </a:r>
-            <a:r>
-              <a:rPr lang="nn-NO" sz="2800" dirty="0" err="1">
-                <a:highlight>
-                  <a:srgbClr val="FFFFFF"/>
-                </a:highlight>
-              </a:rPr>
-              <a:t>key</a:t>
-            </a:r>
-            <a:r>
-              <a:rPr lang="nn-NO" sz="2800" dirty="0">
-                <a:highlight>
-                  <a:srgbClr val="FFFFFF"/>
-                </a:highlight>
-              </a:rPr>
-              <a:t> die </a:t>
-            </a:r>
-            <a:r>
-              <a:rPr lang="nn-NO" sz="2800" dirty="0" err="1">
-                <a:highlight>
-                  <a:srgbClr val="FFFFFF"/>
-                </a:highlight>
-              </a:rPr>
-              <a:t>gebruikt</a:t>
-            </a:r>
-            <a:r>
-              <a:rPr lang="nn-NO" sz="2800" dirty="0">
-                <a:highlight>
-                  <a:srgbClr val="FFFFFF"/>
-                </a:highlight>
-              </a:rPr>
-              <a:t> </a:t>
-            </a:r>
-            <a:r>
-              <a:rPr lang="nn-NO" sz="2800" dirty="0" err="1">
-                <a:highlight>
-                  <a:srgbClr val="FFFFFF"/>
-                </a:highlight>
-              </a:rPr>
-              <a:t>wordt</a:t>
-            </a:r>
-            <a:r>
-              <a:rPr lang="nn-NO" sz="2800" dirty="0">
-                <a:highlight>
-                  <a:srgbClr val="FFFFFF"/>
-                </a:highlight>
-              </a:rPr>
-              <a:t> </a:t>
-            </a:r>
-            <a:r>
-              <a:rPr lang="nn-NO" sz="2800" dirty="0" err="1">
-                <a:highlight>
-                  <a:srgbClr val="FFFFFF"/>
-                </a:highlight>
-              </a:rPr>
-              <a:t>tijdens</a:t>
-            </a:r>
-            <a:r>
-              <a:rPr lang="nn-NO" sz="2800" dirty="0">
-                <a:highlight>
-                  <a:srgbClr val="FFFFFF"/>
-                </a:highlight>
-              </a:rPr>
-              <a:t> het join-</a:t>
-            </a:r>
-            <a:r>
-              <a:rPr lang="nn-NO" sz="2800" dirty="0" err="1">
-                <a:highlight>
-                  <a:srgbClr val="FFFFFF"/>
-                </a:highlight>
-              </a:rPr>
-              <a:t>proces</a:t>
-            </a:r>
-            <a:r>
-              <a:rPr lang="nn-NO" sz="2800" dirty="0">
-                <a:highlight>
-                  <a:srgbClr val="FFFFFF"/>
-                </a:highlight>
-              </a:rPr>
-              <a:t> en </a:t>
-            </a:r>
-            <a:r>
-              <a:rPr lang="nn-NO" sz="2800" dirty="0" err="1">
-                <a:highlight>
-                  <a:srgbClr val="FFFFFF"/>
-                </a:highlight>
-              </a:rPr>
-              <a:t>voor</a:t>
-            </a:r>
-            <a:r>
-              <a:rPr lang="nn-NO" sz="2800" dirty="0">
-                <a:highlight>
-                  <a:srgbClr val="FFFFFF"/>
-                </a:highlight>
-              </a:rPr>
-              <a:t> </a:t>
-            </a:r>
-            <a:r>
-              <a:rPr lang="nn-NO" sz="2800" dirty="0" err="1">
-                <a:highlight>
-                  <a:srgbClr val="FFFFFF"/>
-                </a:highlight>
-              </a:rPr>
-              <a:t>beveiliging</a:t>
-            </a:r>
-            <a:r>
-              <a:rPr lang="nn-NO" sz="2800" dirty="0">
-                <a:highlight>
-                  <a:srgbClr val="FFFFFF"/>
-                </a:highlight>
-              </a:rPr>
-              <a:t> van </a:t>
-            </a:r>
-            <a:r>
-              <a:rPr lang="nn-NO" sz="2800" dirty="0" err="1">
-                <a:highlight>
-                  <a:srgbClr val="FFFFFF"/>
-                </a:highlight>
-              </a:rPr>
-              <a:t>applicatiedata</a:t>
-            </a:r>
-            <a:r>
-              <a:rPr lang="nn-NO" sz="2800" dirty="0">
-                <a:highlight>
-                  <a:srgbClr val="FFFFFF"/>
-                </a:highlight>
-              </a:rPr>
-              <a:t>.</a:t>
-            </a:r>
-          </a:p>
-          <a:p>
-            <a:pPr marL="0" indent="0">
-              <a:buNone/>
-            </a:pPr>
-            <a:r>
-              <a:rPr lang="nn-NO" sz="2800" b="1" dirty="0" err="1">
-                <a:highlight>
-                  <a:srgbClr val="FFFFFF"/>
-                </a:highlight>
-              </a:rPr>
-              <a:t>NwkKey</a:t>
-            </a:r>
-            <a:r>
-              <a:rPr lang="nn-NO" b="1" dirty="0">
-                <a:highlight>
-                  <a:srgbClr val="FFFFFF"/>
-                </a:highlight>
-              </a:rPr>
-              <a:t>: </a:t>
-            </a:r>
-            <a:r>
-              <a:rPr lang="nn-NO" sz="2800" dirty="0" err="1">
-                <a:highlight>
-                  <a:srgbClr val="FFFFFF"/>
-                </a:highlight>
-              </a:rPr>
-              <a:t>Bij</a:t>
-            </a:r>
-            <a:r>
-              <a:rPr lang="nn-NO" sz="2800" dirty="0">
-                <a:highlight>
-                  <a:srgbClr val="FFFFFF"/>
-                </a:highlight>
-              </a:rPr>
-              <a:t> </a:t>
-            </a:r>
-            <a:r>
-              <a:rPr lang="nn-NO" sz="2800" dirty="0" err="1">
-                <a:highlight>
-                  <a:srgbClr val="FFFFFF"/>
-                </a:highlight>
-              </a:rPr>
-              <a:t>LoRaWAN</a:t>
-            </a:r>
-            <a:r>
-              <a:rPr lang="nn-NO" sz="2800" dirty="0">
-                <a:highlight>
-                  <a:srgbClr val="FFFFFF"/>
-                </a:highlight>
-              </a:rPr>
-              <a:t> 1.1 is </a:t>
-            </a:r>
-            <a:r>
-              <a:rPr lang="nn-NO" sz="2800" dirty="0" err="1">
-                <a:highlight>
-                  <a:srgbClr val="FFFFFF"/>
-                </a:highlight>
-              </a:rPr>
-              <a:t>ook</a:t>
-            </a:r>
-            <a:r>
-              <a:rPr lang="nn-NO" sz="2800" dirty="0">
-                <a:highlight>
-                  <a:srgbClr val="FFFFFF"/>
-                </a:highlight>
-              </a:rPr>
-              <a:t> </a:t>
-            </a:r>
-            <a:r>
-              <a:rPr lang="nn-NO" sz="2800" dirty="0" err="1">
-                <a:highlight>
-                  <a:srgbClr val="FFFFFF"/>
-                </a:highlight>
-              </a:rPr>
-              <a:t>een</a:t>
-            </a:r>
-            <a:r>
-              <a:rPr lang="nn-NO" sz="2800" dirty="0">
-                <a:highlight>
-                  <a:srgbClr val="FFFFFF"/>
-                </a:highlight>
-              </a:rPr>
-              <a:t> </a:t>
-            </a:r>
-            <a:r>
-              <a:rPr lang="nn-NO" sz="2800" dirty="0" err="1">
-                <a:highlight>
-                  <a:srgbClr val="FFFFFF"/>
-                </a:highlight>
-              </a:rPr>
-              <a:t>NwkKey</a:t>
-            </a:r>
-            <a:r>
-              <a:rPr lang="nn-NO" sz="2800" dirty="0">
-                <a:highlight>
-                  <a:srgbClr val="FFFFFF"/>
-                </a:highlight>
-              </a:rPr>
-              <a:t> </a:t>
-            </a:r>
-            <a:r>
-              <a:rPr lang="nn-NO" sz="2800" dirty="0" err="1">
-                <a:highlight>
-                  <a:srgbClr val="FFFFFF"/>
-                </a:highlight>
-              </a:rPr>
-              <a:t>nodig</a:t>
-            </a:r>
-            <a:r>
-              <a:rPr lang="nn-NO" sz="2800" dirty="0">
-                <a:highlight>
-                  <a:srgbClr val="FFFFFF"/>
-                </a:highlight>
-              </a:rPr>
-              <a:t> </a:t>
-            </a:r>
-            <a:r>
-              <a:rPr lang="nn-NO" sz="2800" dirty="0" err="1">
-                <a:highlight>
-                  <a:srgbClr val="FFFFFF"/>
-                </a:highlight>
-              </a:rPr>
-              <a:t>voor</a:t>
-            </a:r>
-            <a:r>
-              <a:rPr lang="nn-NO" sz="2800" dirty="0">
-                <a:highlight>
-                  <a:srgbClr val="FFFFFF"/>
-                </a:highlight>
-              </a:rPr>
-              <a:t> de </a:t>
-            </a:r>
-            <a:r>
-              <a:rPr lang="nn-NO" sz="2800" dirty="0" err="1">
-                <a:highlight>
-                  <a:srgbClr val="FFFFFF"/>
-                </a:highlight>
-              </a:rPr>
-              <a:t>netwerkbeveiliging</a:t>
-            </a:r>
-            <a:r>
-              <a:rPr lang="nn-NO" sz="2800" dirty="0">
-                <a:highlight>
-                  <a:srgbClr val="FFFFFF"/>
-                </a:highlight>
-              </a:rPr>
-              <a:t>. </a:t>
-            </a:r>
-          </a:p>
-          <a:p>
-            <a:pPr marL="0" indent="0">
-              <a:buNone/>
-            </a:pPr>
-            <a:endParaRPr lang="nn-NO" sz="2800" dirty="0">
-              <a:highlight>
-                <a:srgbClr val="FFFFFF"/>
-              </a:highlight>
-            </a:endParaRPr>
-          </a:p>
-          <a:p>
-            <a:pPr marL="0" indent="0">
-              <a:buNone/>
-            </a:pPr>
-            <a:r>
-              <a:rPr lang="nn-NO" sz="2800" dirty="0" err="1">
-                <a:highlight>
-                  <a:srgbClr val="FFFFFF"/>
-                </a:highlight>
-              </a:rPr>
-              <a:t>Waarom</a:t>
-            </a:r>
-            <a:r>
-              <a:rPr lang="nn-NO" sz="2800" dirty="0">
-                <a:highlight>
-                  <a:srgbClr val="FFFFFF"/>
-                </a:highlight>
-              </a:rPr>
-              <a:t> </a:t>
-            </a:r>
-            <a:r>
-              <a:rPr lang="nn-NO" sz="2800" dirty="0" err="1">
-                <a:highlight>
-                  <a:srgbClr val="FFFFFF"/>
-                </a:highlight>
-              </a:rPr>
-              <a:t>zijn</a:t>
-            </a:r>
-            <a:r>
-              <a:rPr lang="nn-NO" sz="2800" dirty="0">
-                <a:highlight>
-                  <a:srgbClr val="FFFFFF"/>
-                </a:highlight>
-              </a:rPr>
-              <a:t> </a:t>
-            </a:r>
-            <a:r>
-              <a:rPr lang="nn-NO" sz="2800" dirty="0" err="1">
-                <a:highlight>
-                  <a:srgbClr val="FFFFFF"/>
-                </a:highlight>
-              </a:rPr>
-              <a:t>deze</a:t>
-            </a:r>
-            <a:r>
-              <a:rPr lang="nn-NO" sz="2800" dirty="0">
-                <a:highlight>
-                  <a:srgbClr val="FFFFFF"/>
-                </a:highlight>
-              </a:rPr>
-              <a:t> </a:t>
-            </a:r>
-            <a:r>
-              <a:rPr lang="nn-NO" sz="2800" dirty="0" err="1">
-                <a:highlight>
-                  <a:srgbClr val="FFFFFF"/>
-                </a:highlight>
-              </a:rPr>
-              <a:t>belangrijk</a:t>
-            </a:r>
-            <a:r>
-              <a:rPr lang="nn-NO" sz="2800" dirty="0">
-                <a:highlight>
-                  <a:srgbClr val="FFFFFF"/>
-                </a:highlight>
-              </a:rPr>
-              <a:t>?</a:t>
-            </a:r>
-          </a:p>
-          <a:p>
-            <a:pPr marL="0" indent="0">
-              <a:buNone/>
-            </a:pPr>
-            <a:r>
-              <a:rPr lang="nn-NO" sz="2800" dirty="0">
-                <a:highlight>
-                  <a:srgbClr val="FFFFFF"/>
-                </a:highlight>
-              </a:rPr>
-              <a:t>Alleen </a:t>
-            </a:r>
-            <a:r>
-              <a:rPr lang="nn-NO" sz="2800" dirty="0" err="1">
-                <a:highlight>
-                  <a:srgbClr val="FFFFFF"/>
-                </a:highlight>
-              </a:rPr>
-              <a:t>als</a:t>
-            </a:r>
-            <a:r>
-              <a:rPr lang="nn-NO" sz="2800" dirty="0">
-                <a:highlight>
-                  <a:srgbClr val="FFFFFF"/>
-                </a:highlight>
-              </a:rPr>
-              <a:t> </a:t>
-            </a:r>
-            <a:r>
-              <a:rPr lang="nn-NO" sz="2800" dirty="0" err="1">
-                <a:highlight>
-                  <a:srgbClr val="FFFFFF"/>
-                </a:highlight>
-              </a:rPr>
-              <a:t>identifiers</a:t>
-            </a:r>
-            <a:r>
-              <a:rPr lang="nn-NO" sz="2800" dirty="0">
-                <a:highlight>
-                  <a:srgbClr val="FFFFFF"/>
-                </a:highlight>
-              </a:rPr>
-              <a:t>, </a:t>
-            </a:r>
-            <a:r>
-              <a:rPr lang="nn-NO" sz="2800" dirty="0" err="1">
-                <a:highlight>
-                  <a:srgbClr val="FFFFFF"/>
-                </a:highlight>
-              </a:rPr>
-              <a:t>LoRaWAN-versie</a:t>
-            </a:r>
-            <a:r>
-              <a:rPr lang="nn-NO" sz="2800" dirty="0">
-                <a:highlight>
-                  <a:srgbClr val="FFFFFF"/>
-                </a:highlight>
-              </a:rPr>
-              <a:t>, regionale parameters en </a:t>
-            </a:r>
-            <a:r>
-              <a:rPr lang="nn-NO" sz="2800" dirty="0" err="1">
-                <a:highlight>
-                  <a:srgbClr val="FFFFFF"/>
-                </a:highlight>
-              </a:rPr>
-              <a:t>keys</a:t>
-            </a:r>
-            <a:r>
-              <a:rPr lang="nn-NO" sz="2800" dirty="0">
-                <a:highlight>
-                  <a:srgbClr val="FFFFFF"/>
-                </a:highlight>
-              </a:rPr>
-              <a:t> </a:t>
-            </a:r>
-            <a:r>
-              <a:rPr lang="nn-NO" sz="2800" dirty="0" err="1">
-                <a:highlight>
-                  <a:srgbClr val="FFFFFF"/>
-                </a:highlight>
-              </a:rPr>
-              <a:t>precies</a:t>
-            </a:r>
-            <a:r>
-              <a:rPr lang="nn-NO" sz="2800" dirty="0">
-                <a:highlight>
-                  <a:srgbClr val="FFFFFF"/>
-                </a:highlight>
-              </a:rPr>
-              <a:t> </a:t>
-            </a:r>
-            <a:r>
-              <a:rPr lang="nn-NO" sz="2800" dirty="0" err="1">
-                <a:highlight>
-                  <a:srgbClr val="FFFFFF"/>
-                </a:highlight>
-              </a:rPr>
-              <a:t>overeenkomen</a:t>
-            </a:r>
-            <a:r>
-              <a:rPr lang="nn-NO" sz="2800" dirty="0">
-                <a:highlight>
-                  <a:srgbClr val="FFFFFF"/>
-                </a:highlight>
-              </a:rPr>
-              <a:t> tussen </a:t>
-            </a:r>
-            <a:r>
-              <a:rPr lang="nn-NO" sz="2800" dirty="0" err="1">
-                <a:highlight>
-                  <a:srgbClr val="FFFFFF"/>
-                </a:highlight>
-              </a:rPr>
-              <a:t>device</a:t>
-            </a:r>
-            <a:r>
-              <a:rPr lang="nn-NO" sz="2800" dirty="0">
-                <a:highlight>
-                  <a:srgbClr val="FFFFFF"/>
-                </a:highlight>
-              </a:rPr>
-              <a:t> en TTN, kan </a:t>
-            </a:r>
-            <a:r>
-              <a:rPr lang="nn-NO" sz="2800" dirty="0" err="1">
-                <a:highlight>
-                  <a:srgbClr val="FFFFFF"/>
-                </a:highlight>
-              </a:rPr>
-              <a:t>een</a:t>
-            </a:r>
-            <a:r>
-              <a:rPr lang="nn-NO" sz="2800" dirty="0">
-                <a:highlight>
-                  <a:srgbClr val="FFFFFF"/>
-                </a:highlight>
-              </a:rPr>
-              <a:t> </a:t>
-            </a:r>
-            <a:r>
-              <a:rPr lang="nn-NO" sz="2800" dirty="0" err="1">
-                <a:highlight>
-                  <a:srgbClr val="FFFFFF"/>
-                </a:highlight>
-              </a:rPr>
-              <a:t>device</a:t>
-            </a:r>
-            <a:r>
-              <a:rPr lang="nn-NO" sz="2800" dirty="0">
-                <a:highlight>
-                  <a:srgbClr val="FFFFFF"/>
-                </a:highlight>
-              </a:rPr>
-              <a:t> </a:t>
-            </a:r>
-            <a:r>
-              <a:rPr lang="nn-NO" sz="2800" dirty="0" err="1">
-                <a:highlight>
-                  <a:srgbClr val="FFFFFF"/>
-                </a:highlight>
-              </a:rPr>
-              <a:t>succesvol</a:t>
-            </a:r>
-            <a:r>
-              <a:rPr lang="nn-NO" sz="2800" dirty="0">
-                <a:highlight>
-                  <a:srgbClr val="FFFFFF"/>
-                </a:highlight>
-              </a:rPr>
-              <a:t> </a:t>
-            </a:r>
-            <a:r>
-              <a:rPr lang="nn-NO" sz="2800" dirty="0" err="1">
-                <a:highlight>
-                  <a:srgbClr val="FFFFFF"/>
-                </a:highlight>
-              </a:rPr>
-              <a:t>joinen</a:t>
-            </a:r>
-            <a:r>
-              <a:rPr lang="nn-NO" sz="2800" dirty="0">
-                <a:highlight>
-                  <a:srgbClr val="FFFFFF"/>
-                </a:highlight>
-              </a:rPr>
-              <a:t> en data </a:t>
-            </a:r>
-            <a:r>
-              <a:rPr lang="nn-NO" sz="2800" dirty="0" err="1">
-                <a:highlight>
-                  <a:srgbClr val="FFFFFF"/>
-                </a:highlight>
-              </a:rPr>
-              <a:t>uitwisselen</a:t>
-            </a:r>
-            <a:r>
-              <a:rPr lang="nn-NO" sz="2800" dirty="0">
-                <a:highlight>
-                  <a:srgbClr val="FFFFFF"/>
-                </a:highlight>
-              </a:rPr>
-              <a:t>.</a:t>
-            </a:r>
-          </a:p>
-        </p:txBody>
-      </p:sp>
-    </p:spTree>
-    <p:extLst>
-      <p:ext uri="{BB962C8B-B14F-4D97-AF65-F5344CB8AC3E}">
-        <p14:creationId xmlns:p14="http://schemas.microsoft.com/office/powerpoint/2010/main" val="1372879404"/>
-      </p:ext>
-    </p:extLst>
-  </p:cSld>
-  <p:clrMapOvr>
-    <a:masterClrMapping/>
-  </p:clrMapOvr>
-</p:sld>
-</file>
-
-<file path=ppt/slides/slide8.xml><?xml version="1.0" encoding="utf-8"?>
-<p:sld xmlns:a="http://schemas.openxmlformats.org/drawingml/2006/main" xmlns:r="http://schemas.openxmlformats.org/officeDocument/2006/relationships" xmlns:p="http://schemas.openxmlformats.org/presentationml/2006/main">
-  <p:cSld>
-    <p:spTree>
-      <p:nvGrpSpPr>
-        <p:cNvPr id="1" name=""/>
-        <p:cNvGrpSpPr/>
-        <p:nvPr/>
-      </p:nvGrpSpPr>
-      <p:grpSpPr>
-        <a:xfrm>
-          <a:off x="0" y="0"/>
-          <a:ext cx="0" cy="0"/>
-          <a:chOff x="0" y="0"/>
-          <a:chExt cx="0" cy="0"/>
-        </a:xfrm>
-      </p:grpSpPr>
-      <p:sp>
-        <p:nvSpPr>
-          <p:cNvPr id="2" name="Title 1">
-            <a:extLst>
-              <a:ext uri="{FF2B5EF4-FFF2-40B4-BE49-F238E27FC236}">
-                <a16:creationId xmlns:a16="http://schemas.microsoft.com/office/drawing/2014/main" id="{16E96D0F-E8D5-9303-3D9A-69282BA7814A}"/>
-              </a:ext>
-            </a:extLst>
-          </p:cNvPr>
-          <p:cNvSpPr>
-            <a:spLocks noGrp="1"/>
-          </p:cNvSpPr>
-          <p:nvPr>
-            <p:ph type="title"/>
-          </p:nvPr>
-        </p:nvSpPr>
-        <p:spPr/>
-        <p:txBody>
-          <a:bodyPr/>
-          <a:lstStyle/>
-          <a:p>
-            <a:r>
-              <a:rPr lang="en-US" dirty="0"/>
-              <a:t>Payload decoder</a:t>
-            </a:r>
-            <a:endParaRPr lang="en-NL" dirty="0"/>
-          </a:p>
-        </p:txBody>
-      </p:sp>
-      <p:sp>
-        <p:nvSpPr>
-          <p:cNvPr id="9" name="Tijdelijke aanduiding voor inhoud 8">
-            <a:extLst>
-              <a:ext uri="{FF2B5EF4-FFF2-40B4-BE49-F238E27FC236}">
-                <a16:creationId xmlns:a16="http://schemas.microsoft.com/office/drawing/2014/main" id="{CC9C8E59-173E-0620-2CA2-C760AF17CEE5}"/>
-              </a:ext>
-            </a:extLst>
-          </p:cNvPr>
-          <p:cNvSpPr>
-            <a:spLocks noGrp="1"/>
-          </p:cNvSpPr>
-          <p:nvPr>
-            <p:ph sz="quarter" idx="4"/>
-          </p:nvPr>
-        </p:nvSpPr>
-        <p:spPr>
-          <a:xfrm>
-            <a:off x="838200" y="1690688"/>
-            <a:ext cx="6232451" cy="4658575"/>
-          </a:xfrm>
-        </p:spPr>
-        <p:txBody>
-          <a:bodyPr>
-            <a:normAutofit/>
-          </a:bodyPr>
-          <a:lstStyle/>
-          <a:p>
-            <a:pPr marL="0" indent="0">
-              <a:buNone/>
-            </a:pPr>
-            <a:r>
-              <a:rPr lang="nl-NL" dirty="0"/>
-              <a:t>Een </a:t>
-            </a:r>
-            <a:r>
-              <a:rPr lang="nl-NL" dirty="0" err="1"/>
-              <a:t>LoRaWAN</a:t>
-            </a:r>
-            <a:r>
-              <a:rPr lang="nl-NL" dirty="0"/>
-              <a:t>-device verstuurt meestal een compact binair </a:t>
-            </a:r>
-            <a:r>
-              <a:rPr lang="nl-NL" dirty="0" err="1"/>
-              <a:t>payload</a:t>
-            </a:r>
-            <a:r>
-              <a:rPr lang="nl-NL" dirty="0"/>
-              <a:t>, bijvoorbeeld enkele bytes voor temperatuur, batterijspanning of luchtvochtigheid. Dat is efficiënt op de radioverbinding, maar voor mensen slecht leesbaar. In The </a:t>
-            </a:r>
-            <a:r>
-              <a:rPr lang="nl-NL" dirty="0" err="1"/>
-              <a:t>Things</a:t>
-            </a:r>
-            <a:r>
-              <a:rPr lang="nl-NL" dirty="0"/>
-              <a:t> Stack kun je daarom een </a:t>
-            </a:r>
-            <a:r>
-              <a:rPr lang="nl-NL" dirty="0" err="1"/>
-              <a:t>payload</a:t>
-            </a:r>
-            <a:r>
-              <a:rPr lang="nl-NL" dirty="0"/>
-              <a:t> </a:t>
-            </a:r>
-            <a:r>
-              <a:rPr lang="nl-NL" dirty="0" err="1"/>
-              <a:t>formatter</a:t>
-            </a:r>
-            <a:r>
-              <a:rPr lang="nl-NL" dirty="0"/>
-              <a:t> / decoder instellen. Die zet de ruwe bytes om naar een leesbaar JSON-object, zoals </a:t>
-            </a:r>
-            <a:r>
-              <a:rPr lang="nl-NL" i="1" dirty="0"/>
-              <a:t>{ "</a:t>
-            </a:r>
-            <a:r>
-              <a:rPr lang="nl-NL" i="1" dirty="0" err="1"/>
-              <a:t>temperature_c</a:t>
-            </a:r>
-            <a:r>
-              <a:rPr lang="nl-NL" i="1" dirty="0"/>
-              <a:t>": 21.8 }</a:t>
-            </a:r>
-            <a:r>
-              <a:rPr lang="nl-NL" dirty="0"/>
-              <a:t>.</a:t>
-            </a:r>
-          </a:p>
-        </p:txBody>
-      </p:sp>
-      <p:pic>
-        <p:nvPicPr>
-          <p:cNvPr id="17" name="Afbeelding 16" descr="Afbeelding met tekst, schermopname, software, Multimediasoftware&#10;&#10;Door AI gegenereerde inhoud is mogelijk onjuist.">
-            <a:extLst>
-              <a:ext uri="{FF2B5EF4-FFF2-40B4-BE49-F238E27FC236}">
-                <a16:creationId xmlns:a16="http://schemas.microsoft.com/office/drawing/2014/main" id="{B9831DC1-68EC-F677-F604-96E22ADFCC09}"/>
-              </a:ext>
-            </a:extLst>
-          </p:cNvPr>
-          <p:cNvPicPr>
-            <a:picLocks noChangeAspect="1"/>
-          </p:cNvPicPr>
-          <p:nvPr/>
-        </p:nvPicPr>
-        <p:blipFill>
-          <a:blip r:embed="rId2">
-            <a:extLst>
-              <a:ext uri="{28A0092B-C50C-407E-A947-70E740481C1C}">
-                <a14:useLocalDpi xmlns:a14="http://schemas.microsoft.com/office/drawing/2010/main" val="0"/>
-              </a:ext>
-            </a:extLst>
-          </a:blip>
-          <a:stretch>
-            <a:fillRect/>
-          </a:stretch>
-        </p:blipFill>
-        <p:spPr>
-          <a:xfrm>
-            <a:off x="7070651" y="1690688"/>
-            <a:ext cx="4871120" cy="4295442"/>
-          </a:xfrm>
-          <a:prstGeom prst="rect">
-            <a:avLst/>
-          </a:prstGeom>
-        </p:spPr>
-      </p:pic>
-    </p:spTree>
-    <p:extLst>
-      <p:ext uri="{BB962C8B-B14F-4D97-AF65-F5344CB8AC3E}">
-        <p14:creationId xmlns:p14="http://schemas.microsoft.com/office/powerpoint/2010/main" val="1358296989"/>
-      </p:ext>
-    </p:extLst>
-  </p:cSld>
-  <p:clrMapOvr>
-    <a:masterClrMapping/>
-  </p:clrMapOvr>
-</p:sld>
-</file>
-
-<file path=ppt/slides/slide9.xml><?xml version="1.0" encoding="utf-8"?>
-<p:sld xmlns:a="http://schemas.openxmlformats.org/drawingml/2006/main" xmlns:r="http://schemas.openxmlformats.org/officeDocument/2006/relationships" xmlns:p="http://schemas.openxmlformats.org/presentationml/2006/main">
-  <p:cSld>
-    <p:spTree>
-      <p:nvGrpSpPr>
-        <p:cNvPr id="1" name=""/>
-        <p:cNvGrpSpPr/>
-        <p:nvPr/>
-      </p:nvGrpSpPr>
-      <p:grpSpPr>
-        <a:xfrm>
-          <a:off x="0" y="0"/>
-          <a:ext cx="0" cy="0"/>
-          <a:chOff x="0" y="0"/>
-          <a:chExt cx="0" cy="0"/>
-        </a:xfrm>
-      </p:grpSpPr>
-      <p:sp>
-        <p:nvSpPr>
-          <p:cNvPr id="2" name="Title 1">
-            <a:extLst>
-              <a:ext uri="{FF2B5EF4-FFF2-40B4-BE49-F238E27FC236}">
-                <a16:creationId xmlns:a16="http://schemas.microsoft.com/office/drawing/2014/main" id="{ED86E016-5D62-B09E-AF3C-85136D836E48}"/>
-              </a:ext>
-            </a:extLst>
-          </p:cNvPr>
-          <p:cNvSpPr>
-            <a:spLocks noGrp="1"/>
-          </p:cNvSpPr>
-          <p:nvPr>
-            <p:ph type="title"/>
-          </p:nvPr>
-        </p:nvSpPr>
-        <p:spPr/>
-        <p:txBody>
-          <a:bodyPr/>
-          <a:lstStyle/>
-          <a:p>
-            <a:r>
-              <a:rPr lang="en-US" dirty="0"/>
-              <a:t>En dan nu.. Aan de slag!</a:t>
-            </a:r>
-            <a:endParaRPr lang="en-NL" dirty="0"/>
-          </a:p>
-        </p:txBody>
-      </p:sp>
-      <p:sp>
-        <p:nvSpPr>
-          <p:cNvPr id="3" name="Content Placeholder 2">
-            <a:extLst>
-              <a:ext uri="{FF2B5EF4-FFF2-40B4-BE49-F238E27FC236}">
-                <a16:creationId xmlns:a16="http://schemas.microsoft.com/office/drawing/2014/main" id="{BDAE17AB-7DC7-DDDA-C33E-2F6219D15F37}"/>
-              </a:ext>
-            </a:extLst>
-          </p:cNvPr>
-          <p:cNvSpPr>
-            <a:spLocks noGrp="1"/>
-          </p:cNvSpPr>
-          <p:nvPr>
-            <p:ph idx="1"/>
-          </p:nvPr>
-        </p:nvSpPr>
-        <p:spPr/>
-        <p:txBody>
-          <a:bodyPr/>
-          <a:lstStyle/>
-          <a:p>
-            <a:r>
-              <a:rPr lang="en-US" dirty="0" err="1"/>
-              <a:t>Configureer</a:t>
-            </a:r>
-            <a:r>
-              <a:rPr lang="en-US" dirty="0"/>
-              <a:t> je module op de Raspberry Pi Pico W</a:t>
-            </a:r>
-          </a:p>
-          <a:p>
-            <a:endParaRPr lang="en-US" dirty="0"/>
-          </a:p>
-          <a:p>
-            <a:r>
-              <a:rPr lang="en-US" dirty="0" err="1"/>
-              <a:t>Verstuur</a:t>
-            </a:r>
-            <a:r>
-              <a:rPr lang="en-US" dirty="0"/>
-              <a:t> data </a:t>
-            </a:r>
-            <a:r>
-              <a:rPr lang="en-US" dirty="0" err="1"/>
-              <a:t>naar</a:t>
-            </a:r>
-            <a:r>
-              <a:rPr lang="en-US" dirty="0"/>
-              <a:t> het TTN platform</a:t>
-            </a:r>
-          </a:p>
-        </p:txBody>
-      </p:sp>
-    </p:spTree>
-    <p:extLst>
-      <p:ext uri="{BB962C8B-B14F-4D97-AF65-F5344CB8AC3E}">
-        <p14:creationId xmlns:p14="http://schemas.microsoft.com/office/powerpoint/2010/main" val="2067029959"/>
-      </p:ext>
-    </p:extLst>
-  </p:cSld>
-  <p:clrMapOvr>
-    <a:masterClrMapping/>
-  </p:clrMapOvr>
 </p:sld>
 </file>
 
